--- a/a7/build/out/u4/A7 4.07  Slides.pptx
+++ b/a7/build/out/u4/A7 4.07  Slides.pptx
@@ -3823,8 +3823,8 @@
         </p:nvSpPr>
         <p:spPr>
           <a:xfrm>
-            <a:off x="1192783" y="2287524"/>
-            <a:ext cx="1068832" cy="457200"/>
+            <a:off x="1535324" y="2391156"/>
+            <a:ext cx="1066148" cy="457200"/>
           </a:xfrm>
           <a:prstGeom prst="rect">
             <a:avLst/>
@@ -3833,7 +3833,7 @@
         </p:spPr>
         <p:txBody>
           <a:bodyPr wrap="none" lIns="45720" rIns="45720" tIns="18288" bIns="18288" anchor="ctr">
-            <a:spAutoFit/>
+            <a:noAutofit/>
           </a:bodyPr>
           <a:lstStyle/>
           <a:p>
@@ -3852,7 +3852,7 @@
       </p:sp>
       <p:pic>
         <p:nvPicPr>
-          <p:cNvPr id="10" name="Picture 9" descr="e2b8bd68bb7d8e99.png"/>
+          <p:cNvPr id="10" name="Picture 9" descr="ccc487dd163a747b.png"/>
           <p:cNvPicPr>
             <a:picLocks noChangeAspect="1"/>
           </p:cNvPicPr>
@@ -3866,8 +3866,8 @@
         </p:blipFill>
         <p:spPr>
           <a:xfrm>
-            <a:off x="2124455" y="2194560"/>
-            <a:ext cx="1865376" cy="643128"/>
+            <a:off x="2464312" y="2194560"/>
+            <a:ext cx="1944623" cy="850392"/>
           </a:xfrm>
           <a:prstGeom prst="rect">
             <a:avLst/>
@@ -3882,8 +3882,8 @@
         </p:nvSpPr>
         <p:spPr>
           <a:xfrm>
-            <a:off x="3989831" y="2287524"/>
-            <a:ext cx="1240536" cy="457200"/>
+            <a:off x="4408936" y="2391156"/>
+            <a:ext cx="942097" cy="457200"/>
           </a:xfrm>
           <a:prstGeom prst="rect">
             <a:avLst/>
@@ -3892,7 +3892,7 @@
         </p:spPr>
         <p:txBody>
           <a:bodyPr wrap="none" lIns="45720" rIns="45720" tIns="18288" bIns="18288" anchor="ctr">
-            <a:spAutoFit/>
+            <a:noAutofit/>
           </a:bodyPr>
           <a:lstStyle/>
           <a:p>
@@ -3911,7 +3911,7 @@
       </p:sp>
       <p:pic>
         <p:nvPicPr>
-          <p:cNvPr id="12" name="Picture 11" descr="2af650365bdc2ce9.png"/>
+          <p:cNvPr id="12" name="Picture 11" descr="5bea3106422a0737.png"/>
           <p:cNvPicPr>
             <a:picLocks noChangeAspect="1"/>
           </p:cNvPicPr>
@@ -3925,7 +3925,7 @@
         </p:blipFill>
         <p:spPr>
           <a:xfrm>
-            <a:off x="5093207" y="2336291"/>
+            <a:off x="5213874" y="2439924"/>
             <a:ext cx="1606296" cy="359664"/>
           </a:xfrm>
           <a:prstGeom prst="rect">
@@ -3941,8 +3941,8 @@
         </p:nvSpPr>
         <p:spPr>
           <a:xfrm>
-            <a:off x="6699504" y="2287524"/>
-            <a:ext cx="2099056" cy="457200"/>
+            <a:off x="6820170" y="2391156"/>
+            <a:ext cx="1800668" cy="457200"/>
           </a:xfrm>
           <a:prstGeom prst="rect">
             <a:avLst/>
@@ -3951,7 +3951,7 @@
         </p:spPr>
         <p:txBody>
           <a:bodyPr wrap="none" lIns="45720" rIns="45720" tIns="18288" bIns="18288" anchor="ctr">
-            <a:spAutoFit/>
+            <a:noAutofit/>
           </a:bodyPr>
           <a:lstStyle/>
           <a:p>
@@ -3970,7 +3970,7 @@
       </p:sp>
       <p:pic>
         <p:nvPicPr>
-          <p:cNvPr id="14" name="Picture 13" descr="363ced5d02a26947.png"/>
+          <p:cNvPr id="14" name="Picture 13" descr="412fe3e32d9c1550.png"/>
           <p:cNvPicPr>
             <a:picLocks noChangeAspect="1"/>
           </p:cNvPicPr>
@@ -3984,8 +3984,8 @@
         </p:blipFill>
         <p:spPr>
           <a:xfrm>
-            <a:off x="8661400" y="2337816"/>
-            <a:ext cx="1203960" cy="356616"/>
+            <a:off x="8483678" y="2441448"/>
+            <a:ext cx="1207008" cy="356616"/>
           </a:xfrm>
           <a:prstGeom prst="rect">
             <a:avLst/>
@@ -4000,8 +4000,8 @@
         </p:nvSpPr>
         <p:spPr>
           <a:xfrm>
-            <a:off x="9865359" y="2287524"/>
-            <a:ext cx="1240536" cy="457200"/>
+            <a:off x="9690686" y="2391156"/>
+            <a:ext cx="1072668" cy="457200"/>
           </a:xfrm>
           <a:prstGeom prst="rect">
             <a:avLst/>
@@ -4010,7 +4010,7 @@
         </p:spPr>
         <p:txBody>
           <a:bodyPr wrap="none" lIns="45720" rIns="45720" tIns="18288" bIns="18288" anchor="ctr">
-            <a:spAutoFit/>
+            <a:noAutofit/>
           </a:bodyPr>
           <a:lstStyle/>
           <a:p>
@@ -4035,7 +4035,7 @@
         </p:nvSpPr>
         <p:spPr>
           <a:xfrm>
-            <a:off x="777240" y="3157728"/>
+            <a:off x="777240" y="3364992"/>
             <a:ext cx="10607040" cy="429370"/>
           </a:xfrm>
           <a:prstGeom prst="rect">
@@ -4730,7 +4730,7 @@
       </p:sp>
       <p:pic>
         <p:nvPicPr>
-          <p:cNvPr id="9" name="Picture 8" descr="3dfe6ba35063274e.png"/>
+          <p:cNvPr id="9" name="Picture 8" descr="88a80bd66be46d3a.png"/>
           <p:cNvPicPr>
             <a:picLocks noChangeAspect="1"/>
           </p:cNvPicPr>
@@ -4745,7 +4745,7 @@
         <p:spPr>
           <a:xfrm>
             <a:off x="1828800" y="1920240"/>
-            <a:ext cx="3224784" cy="408432"/>
+            <a:ext cx="3227832" cy="405384"/>
           </a:xfrm>
           <a:prstGeom prst="rect">
             <a:avLst/>
@@ -4760,8 +4760,8 @@
         </p:nvSpPr>
         <p:spPr>
           <a:xfrm>
-            <a:off x="5510784" y="1895856"/>
-            <a:ext cx="5873495" cy="502920"/>
+            <a:off x="5513831" y="1894332"/>
+            <a:ext cx="5870448" cy="502920"/>
           </a:xfrm>
           <a:prstGeom prst="rect">
             <a:avLst/>
@@ -4789,7 +4789,7 @@
       </p:sp>
       <p:pic>
         <p:nvPicPr>
-          <p:cNvPr id="11" name="Picture 10" descr="aa3ff0a219b6d0ca.png"/>
+          <p:cNvPr id="11" name="Picture 10" descr="01bf3bc2e6345cc3.png"/>
           <p:cNvPicPr>
             <a:picLocks noChangeAspect="1"/>
           </p:cNvPicPr>
@@ -4803,8 +4803,8 @@
         </p:blipFill>
         <p:spPr>
           <a:xfrm>
-            <a:off x="1828800" y="2602992"/>
-            <a:ext cx="2487168" cy="353568"/>
+            <a:off x="1828800" y="2599944"/>
+            <a:ext cx="2484120" cy="350520"/>
           </a:xfrm>
           <a:prstGeom prst="rect">
             <a:avLst/>
@@ -4819,7 +4819,7 @@
         </p:nvSpPr>
         <p:spPr>
           <a:xfrm>
-            <a:off x="4773168" y="2551176"/>
+            <a:off x="4770120" y="2546604"/>
             <a:ext cx="6400800" cy="502920"/>
           </a:xfrm>
           <a:prstGeom prst="rect">
@@ -4848,7 +4848,7 @@
       </p:sp>
       <p:pic>
         <p:nvPicPr>
-          <p:cNvPr id="13" name="Picture 12" descr="0e5661e89197ce33.png"/>
+          <p:cNvPr id="13" name="Picture 12" descr="6a57c082688f8b88.png"/>
           <p:cNvPicPr>
             <a:picLocks noChangeAspect="1"/>
           </p:cNvPicPr>
@@ -4862,8 +4862,8 @@
         </p:blipFill>
         <p:spPr>
           <a:xfrm>
-            <a:off x="1828800" y="3230880"/>
-            <a:ext cx="3742944" cy="295656"/>
+            <a:off x="1828800" y="3224783"/>
+            <a:ext cx="3745992" cy="292608"/>
           </a:xfrm>
           <a:prstGeom prst="rect">
             <a:avLst/>
@@ -4878,8 +4878,8 @@
         </p:nvSpPr>
         <p:spPr>
           <a:xfrm>
-            <a:off x="6028944" y="3150108"/>
-            <a:ext cx="5355335" cy="502920"/>
+            <a:off x="6031992" y="3142488"/>
+            <a:ext cx="5352287" cy="502920"/>
           </a:xfrm>
           <a:prstGeom prst="rect">
             <a:avLst/>
@@ -6017,8 +6017,8 @@
         </p:nvSpPr>
         <p:spPr>
           <a:xfrm>
-            <a:off x="3542792" y="2171700"/>
-            <a:ext cx="1927352" cy="457200"/>
+            <a:off x="3665999" y="2171700"/>
+            <a:ext cx="1864823" cy="457200"/>
           </a:xfrm>
           <a:prstGeom prst="rect">
             <a:avLst/>
@@ -6027,7 +6027,7 @@
         </p:spPr>
         <p:txBody>
           <a:bodyPr wrap="none" lIns="45720" rIns="45720" tIns="18288" bIns="18288" anchor="ctr">
-            <a:spAutoFit/>
+            <a:noAutofit/>
           </a:bodyPr>
           <a:lstStyle/>
           <a:p>
@@ -6060,7 +6060,7 @@
         </p:blipFill>
         <p:spPr>
           <a:xfrm>
-            <a:off x="5332984" y="2229612"/>
+            <a:off x="5393662" y="2229612"/>
             <a:ext cx="530352" cy="341376"/>
           </a:xfrm>
           <a:prstGeom prst="rect">
@@ -6076,8 +6076,8 @@
         </p:nvSpPr>
         <p:spPr>
           <a:xfrm>
-            <a:off x="5863336" y="2171700"/>
-            <a:ext cx="1583944" cy="457200"/>
+            <a:off x="5924014" y="2171700"/>
+            <a:ext cx="1474477" cy="457200"/>
           </a:xfrm>
           <a:prstGeom prst="rect">
             <a:avLst/>
@@ -6086,7 +6086,7 @@
         </p:spPr>
         <p:txBody>
           <a:bodyPr wrap="none" lIns="45720" rIns="45720" tIns="18288" bIns="18288" anchor="ctr">
-            <a:spAutoFit/>
+            <a:noAutofit/>
           </a:bodyPr>
           <a:lstStyle/>
           <a:p>
@@ -6119,7 +6119,7 @@
         </p:blipFill>
         <p:spPr>
           <a:xfrm>
-            <a:off x="7310120" y="2260092"/>
+            <a:off x="7261332" y="2260092"/>
             <a:ext cx="1063752" cy="280416"/>
           </a:xfrm>
           <a:prstGeom prst="rect">
@@ -6135,8 +6135,8 @@
         </p:nvSpPr>
         <p:spPr>
           <a:xfrm>
-            <a:off x="8373872" y="2171700"/>
-            <a:ext cx="382016" cy="457200"/>
+            <a:off x="8325084" y="2171700"/>
+            <a:ext cx="307595" cy="457200"/>
           </a:xfrm>
           <a:prstGeom prst="rect">
             <a:avLst/>
@@ -6145,7 +6145,7 @@
         </p:spPr>
         <p:txBody>
           <a:bodyPr wrap="none" lIns="45720" rIns="45720" tIns="18288" bIns="18288" anchor="ctr">
-            <a:spAutoFit/>
+            <a:noAutofit/>
           </a:bodyPr>
           <a:lstStyle/>
           <a:p>
@@ -6503,8 +6503,8 @@
         </p:nvSpPr>
         <p:spPr>
           <a:xfrm>
-            <a:off x="3542792" y="2080260"/>
-            <a:ext cx="1927352" cy="457200"/>
+            <a:off x="3664475" y="2080260"/>
+            <a:ext cx="1864823" cy="457200"/>
           </a:xfrm>
           <a:prstGeom prst="rect">
             <a:avLst/>
@@ -6513,7 +6513,7 @@
         </p:spPr>
         <p:txBody>
           <a:bodyPr wrap="none" lIns="45720" rIns="45720" tIns="18288" bIns="18288" anchor="ctr">
-            <a:spAutoFit/>
+            <a:noAutofit/>
           </a:bodyPr>
           <a:lstStyle/>
           <a:p>
@@ -6532,7 +6532,7 @@
       </p:sp>
       <p:pic>
         <p:nvPicPr>
-          <p:cNvPr id="10" name="Picture 9" descr="8b9f54f367bfb11b.png"/>
+          <p:cNvPr id="10" name="Picture 9" descr="dfb9a8ed903d4273.png"/>
           <p:cNvPicPr>
             <a:picLocks noChangeAspect="1"/>
           </p:cNvPicPr>
@@ -6546,8 +6546,8 @@
         </p:blipFill>
         <p:spPr>
           <a:xfrm>
-            <a:off x="5332984" y="2138171"/>
-            <a:ext cx="530352" cy="341376"/>
+            <a:off x="5392138" y="2138171"/>
+            <a:ext cx="533400" cy="341376"/>
           </a:xfrm>
           <a:prstGeom prst="rect">
             <a:avLst/>
@@ -6562,8 +6562,8 @@
         </p:nvSpPr>
         <p:spPr>
           <a:xfrm>
-            <a:off x="5863336" y="2080260"/>
-            <a:ext cx="1583944" cy="457200"/>
+            <a:off x="5925538" y="2080260"/>
+            <a:ext cx="1474477" cy="457200"/>
           </a:xfrm>
           <a:prstGeom prst="rect">
             <a:avLst/>
@@ -6572,7 +6572,7 @@
         </p:spPr>
         <p:txBody>
           <a:bodyPr wrap="none" lIns="45720" rIns="45720" tIns="18288" bIns="18288" anchor="ctr">
-            <a:spAutoFit/>
+            <a:noAutofit/>
           </a:bodyPr>
           <a:lstStyle/>
           <a:p>
@@ -6591,7 +6591,7 @@
       </p:sp>
       <p:pic>
         <p:nvPicPr>
-          <p:cNvPr id="12" name="Picture 11" descr="0c0822ea9a5c4000.png"/>
+          <p:cNvPr id="12" name="Picture 11" descr="2a9ba365712c43c3.png"/>
           <p:cNvPicPr>
             <a:picLocks noChangeAspect="1"/>
           </p:cNvPicPr>
@@ -6605,7 +6605,7 @@
         </p:blipFill>
         <p:spPr>
           <a:xfrm>
-            <a:off x="7310120" y="2168652"/>
+            <a:off x="7262856" y="2168652"/>
             <a:ext cx="1063752" cy="280416"/>
           </a:xfrm>
           <a:prstGeom prst="rect">
@@ -6621,8 +6621,8 @@
         </p:nvSpPr>
         <p:spPr>
           <a:xfrm>
-            <a:off x="8373872" y="2080260"/>
-            <a:ext cx="382016" cy="457200"/>
+            <a:off x="8326608" y="2080260"/>
+            <a:ext cx="307595" cy="457200"/>
           </a:xfrm>
           <a:prstGeom prst="rect">
             <a:avLst/>
@@ -6631,7 +6631,7 @@
         </p:spPr>
         <p:txBody>
           <a:bodyPr wrap="none" lIns="45720" rIns="45720" tIns="18288" bIns="18288" anchor="ctr">
-            <a:spAutoFit/>
+            <a:noAutofit/>
           </a:bodyPr>
           <a:lstStyle/>
           <a:p>
@@ -6998,8 +6998,8 @@
         </p:nvSpPr>
         <p:spPr>
           <a:xfrm>
-            <a:off x="1619503" y="2171700"/>
-            <a:ext cx="3472688" cy="457200"/>
+            <a:off x="2131804" y="2171700"/>
+            <a:ext cx="3076140" cy="457200"/>
           </a:xfrm>
           <a:prstGeom prst="rect">
             <a:avLst/>
@@ -7008,7 +7008,7 @@
         </p:spPr>
         <p:txBody>
           <a:bodyPr wrap="none" lIns="45720" rIns="45720" tIns="18288" bIns="18288" anchor="ctr">
-            <a:spAutoFit/>
+            <a:noAutofit/>
           </a:bodyPr>
           <a:lstStyle/>
           <a:p>
@@ -7041,7 +7041,7 @@
         </p:blipFill>
         <p:spPr>
           <a:xfrm>
-            <a:off x="4955032" y="2260092"/>
+            <a:off x="5070784" y="2260092"/>
             <a:ext cx="1082040" cy="280416"/>
           </a:xfrm>
           <a:prstGeom prst="rect">
@@ -7057,8 +7057,8 @@
         </p:nvSpPr>
         <p:spPr>
           <a:xfrm>
-            <a:off x="6037072" y="2171700"/>
-            <a:ext cx="2785872" cy="457200"/>
+            <a:off x="6152824" y="2171700"/>
+            <a:ext cx="2325686" cy="457200"/>
           </a:xfrm>
           <a:prstGeom prst="rect">
             <a:avLst/>
@@ -7067,7 +7067,7 @@
         </p:spPr>
         <p:txBody>
           <a:bodyPr wrap="none" lIns="45720" rIns="45720" tIns="18288" bIns="18288" anchor="ctr">
-            <a:spAutoFit/>
+            <a:noAutofit/>
           </a:bodyPr>
           <a:lstStyle/>
           <a:p>
@@ -7100,7 +7100,7 @@
         </p:blipFill>
         <p:spPr>
           <a:xfrm>
-            <a:off x="8685784" y="2258568"/>
+            <a:off x="8341351" y="2258568"/>
             <a:ext cx="752856" cy="283464"/>
           </a:xfrm>
           <a:prstGeom prst="rect">
@@ -7116,8 +7116,8 @@
         </p:nvSpPr>
         <p:spPr>
           <a:xfrm>
-            <a:off x="9438640" y="2171700"/>
-            <a:ext cx="1240536" cy="457200"/>
+            <a:off x="9094207" y="2171700"/>
+            <a:ext cx="1072668" cy="457200"/>
           </a:xfrm>
           <a:prstGeom prst="rect">
             <a:avLst/>
@@ -7126,7 +7126,7 @@
         </p:spPr>
         <p:txBody>
           <a:bodyPr wrap="none" lIns="45720" rIns="45720" tIns="18288" bIns="18288" anchor="ctr">
-            <a:spAutoFit/>
+            <a:noAutofit/>
           </a:bodyPr>
           <a:lstStyle/>
           <a:p>
@@ -7186,8 +7186,8 @@
         </p:nvSpPr>
         <p:spPr>
           <a:xfrm>
-            <a:off x="2942843" y="3482671"/>
-            <a:ext cx="4674616" cy="457200"/>
+            <a:off x="3154117" y="3563443"/>
+            <a:ext cx="4265529" cy="457200"/>
           </a:xfrm>
           <a:prstGeom prst="rect">
             <a:avLst/>
@@ -7196,7 +7196,7 @@
         </p:spPr>
         <p:txBody>
           <a:bodyPr wrap="none" lIns="45720" rIns="45720" tIns="18288" bIns="18288" anchor="ctr">
-            <a:spAutoFit/>
+            <a:noAutofit/>
           </a:bodyPr>
           <a:lstStyle/>
           <a:p>
@@ -7215,7 +7215,7 @@
       </p:sp>
       <p:pic>
         <p:nvPicPr>
-          <p:cNvPr id="16" name="Picture 15" descr="cd03183ea8e9c83d.png"/>
+          <p:cNvPr id="16" name="Picture 15" descr="69f338afbe20426e.png"/>
           <p:cNvPicPr>
             <a:picLocks noChangeAspect="1"/>
           </p:cNvPicPr>
@@ -7229,8 +7229,8 @@
         </p:blipFill>
         <p:spPr>
           <a:xfrm>
-            <a:off x="7480300" y="3455239"/>
-            <a:ext cx="1493520" cy="512064"/>
+            <a:off x="7282486" y="3455239"/>
+            <a:ext cx="1554480" cy="673608"/>
           </a:xfrm>
           <a:prstGeom prst="rect">
             <a:avLst/>
@@ -7245,8 +7245,8 @@
         </p:nvSpPr>
         <p:spPr>
           <a:xfrm>
-            <a:off x="8973820" y="3482671"/>
-            <a:ext cx="382016" cy="457200"/>
+            <a:off x="8836966" y="3563443"/>
+            <a:ext cx="307595" cy="457200"/>
           </a:xfrm>
           <a:prstGeom prst="rect">
             <a:avLst/>
@@ -7255,7 +7255,7 @@
         </p:spPr>
         <p:txBody>
           <a:bodyPr wrap="none" lIns="45720" rIns="45720" tIns="18288" bIns="18288" anchor="ctr">
-            <a:spAutoFit/>
+            <a:noAutofit/>
           </a:bodyPr>
           <a:lstStyle/>
           <a:p>
@@ -7280,7 +7280,7 @@
         </p:nvSpPr>
         <p:spPr>
           <a:xfrm>
-            <a:off x="777240" y="4378783"/>
+            <a:off x="777240" y="4540327"/>
             <a:ext cx="10607040" cy="457200"/>
           </a:xfrm>
           <a:prstGeom prst="rect">
@@ -7315,7 +7315,7 @@
         </p:nvSpPr>
         <p:spPr>
           <a:xfrm>
-            <a:off x="777240" y="4863415"/>
+            <a:off x="777240" y="5024959"/>
             <a:ext cx="10607040" cy="365760"/>
           </a:xfrm>
           <a:prstGeom prst="rect">
@@ -7613,8 +7613,8 @@
         </p:nvSpPr>
         <p:spPr>
           <a:xfrm>
-            <a:off x="1619503" y="2080260"/>
-            <a:ext cx="3472688" cy="457200"/>
+            <a:off x="2131804" y="2080260"/>
+            <a:ext cx="3076140" cy="457200"/>
           </a:xfrm>
           <a:prstGeom prst="rect">
             <a:avLst/>
@@ -7623,7 +7623,7 @@
         </p:spPr>
         <p:txBody>
           <a:bodyPr wrap="none" lIns="45720" rIns="45720" tIns="18288" bIns="18288" anchor="ctr">
-            <a:spAutoFit/>
+            <a:noAutofit/>
           </a:bodyPr>
           <a:lstStyle/>
           <a:p>
@@ -7656,7 +7656,7 @@
         </p:blipFill>
         <p:spPr>
           <a:xfrm>
-            <a:off x="4955032" y="2168652"/>
+            <a:off x="5070784" y="2168652"/>
             <a:ext cx="1082040" cy="280416"/>
           </a:xfrm>
           <a:prstGeom prst="rect">
@@ -7672,8 +7672,8 @@
         </p:nvSpPr>
         <p:spPr>
           <a:xfrm>
-            <a:off x="6037072" y="2080260"/>
-            <a:ext cx="2785872" cy="457200"/>
+            <a:off x="6152824" y="2080260"/>
+            <a:ext cx="2325686" cy="457200"/>
           </a:xfrm>
           <a:prstGeom prst="rect">
             <a:avLst/>
@@ -7682,7 +7682,7 @@
         </p:spPr>
         <p:txBody>
           <a:bodyPr wrap="none" lIns="45720" rIns="45720" tIns="18288" bIns="18288" anchor="ctr">
-            <a:spAutoFit/>
+            <a:noAutofit/>
           </a:bodyPr>
           <a:lstStyle/>
           <a:p>
@@ -7715,7 +7715,7 @@
         </p:blipFill>
         <p:spPr>
           <a:xfrm>
-            <a:off x="8685784" y="2167127"/>
+            <a:off x="8341351" y="2167127"/>
             <a:ext cx="752856" cy="283464"/>
           </a:xfrm>
           <a:prstGeom prst="rect">
@@ -7731,8 +7731,8 @@
         </p:nvSpPr>
         <p:spPr>
           <a:xfrm>
-            <a:off x="9438640" y="2080260"/>
-            <a:ext cx="1240536" cy="457200"/>
+            <a:off x="9094207" y="2080260"/>
+            <a:ext cx="1072668" cy="457200"/>
           </a:xfrm>
           <a:prstGeom prst="rect">
             <a:avLst/>
@@ -7741,7 +7741,7 @@
         </p:spPr>
         <p:txBody>
           <a:bodyPr wrap="none" lIns="45720" rIns="45720" tIns="18288" bIns="18288" anchor="ctr">
-            <a:spAutoFit/>
+            <a:noAutofit/>
           </a:bodyPr>
           <a:lstStyle/>
           <a:p>
@@ -7801,8 +7801,8 @@
         </p:nvSpPr>
         <p:spPr>
           <a:xfrm>
-            <a:off x="2942843" y="3391231"/>
-            <a:ext cx="4674616" cy="457200"/>
+            <a:off x="3152593" y="3472003"/>
+            <a:ext cx="4265529" cy="457200"/>
           </a:xfrm>
           <a:prstGeom prst="rect">
             <a:avLst/>
@@ -7811,7 +7811,7 @@
         </p:spPr>
         <p:txBody>
           <a:bodyPr wrap="none" lIns="45720" rIns="45720" tIns="18288" bIns="18288" anchor="ctr">
-            <a:spAutoFit/>
+            <a:noAutofit/>
           </a:bodyPr>
           <a:lstStyle/>
           <a:p>
@@ -7830,7 +7830,7 @@
       </p:sp>
       <p:pic>
         <p:nvPicPr>
-          <p:cNvPr id="16" name="Picture 15" descr="cd03183ea8e9c83d.png"/>
+          <p:cNvPr id="16" name="Picture 15" descr="0adc02d1493e5ae4.png"/>
           <p:cNvPicPr>
             <a:picLocks noChangeAspect="1"/>
           </p:cNvPicPr>
@@ -7844,8 +7844,8 @@
         </p:blipFill>
         <p:spPr>
           <a:xfrm>
-            <a:off x="7480300" y="3363799"/>
-            <a:ext cx="1493520" cy="512064"/>
+            <a:off x="7280962" y="3363799"/>
+            <a:ext cx="1557528" cy="673608"/>
           </a:xfrm>
           <a:prstGeom prst="rect">
             <a:avLst/>
@@ -7860,8 +7860,8 @@
         </p:nvSpPr>
         <p:spPr>
           <a:xfrm>
-            <a:off x="8973820" y="3391231"/>
-            <a:ext cx="382016" cy="457200"/>
+            <a:off x="8838490" y="3472003"/>
+            <a:ext cx="307595" cy="457200"/>
           </a:xfrm>
           <a:prstGeom prst="rect">
             <a:avLst/>
@@ -7870,7 +7870,7 @@
         </p:spPr>
         <p:txBody>
           <a:bodyPr wrap="none" lIns="45720" rIns="45720" tIns="18288" bIns="18288" anchor="ctr">
-            <a:spAutoFit/>
+            <a:noAutofit/>
           </a:bodyPr>
           <a:lstStyle/>
           <a:p>
@@ -7895,7 +7895,7 @@
         </p:nvSpPr>
         <p:spPr>
           <a:xfrm>
-            <a:off x="1828800" y="4195903"/>
+            <a:off x="1828800" y="4357447"/>
             <a:ext cx="8503920" cy="548640"/>
           </a:xfrm>
           <a:prstGeom prst="rect">
@@ -7930,7 +7930,7 @@
         </p:nvSpPr>
         <p:spPr>
           <a:xfrm>
-            <a:off x="777240" y="4927423"/>
+            <a:off x="777240" y="5088967"/>
             <a:ext cx="10607040" cy="548640"/>
           </a:xfrm>
           <a:prstGeom prst="rect">
@@ -8632,7 +8632,7 @@
         <p:spPr>
           <a:xfrm>
             <a:off x="1874519" y="1760220"/>
-            <a:ext cx="969771" cy="457200"/>
+            <a:ext cx="720605" cy="457200"/>
           </a:xfrm>
           <a:prstGeom prst="rect">
             <a:avLst/>
@@ -8641,7 +8641,7 @@
         </p:spPr>
         <p:txBody>
           <a:bodyPr wrap="none" lIns="45720" rIns="45720" tIns="18288" bIns="18288" anchor="ctr">
-            <a:spAutoFit/>
+            <a:noAutofit/>
           </a:bodyPr>
           <a:lstStyle/>
           <a:p>
@@ -8674,7 +8674,7 @@
         </p:blipFill>
         <p:spPr>
           <a:xfrm>
-            <a:off x="2707132" y="1821180"/>
+            <a:off x="2457965" y="1821180"/>
             <a:ext cx="1554480" cy="335280"/>
           </a:xfrm>
           <a:prstGeom prst="rect">
@@ -8691,7 +8691,7 @@
         <p:spPr>
           <a:xfrm>
             <a:off x="1874519" y="2372868"/>
-            <a:ext cx="969771" cy="457200"/>
+            <a:ext cx="726811" cy="457200"/>
           </a:xfrm>
           <a:prstGeom prst="rect">
             <a:avLst/>
@@ -8700,7 +8700,7 @@
         </p:spPr>
         <p:txBody>
           <a:bodyPr wrap="none" lIns="45720" rIns="45720" tIns="18288" bIns="18288" anchor="ctr">
-            <a:spAutoFit/>
+            <a:noAutofit/>
           </a:bodyPr>
           <a:lstStyle/>
           <a:p>
@@ -8733,7 +8733,7 @@
         </p:blipFill>
         <p:spPr>
           <a:xfrm>
-            <a:off x="2707132" y="2397252"/>
+            <a:off x="2464171" y="2397252"/>
             <a:ext cx="1588008" cy="408432"/>
           </a:xfrm>
           <a:prstGeom prst="rect">
@@ -8749,8 +8749,8 @@
         </p:nvSpPr>
         <p:spPr>
           <a:xfrm>
-            <a:off x="1874519" y="2991612"/>
-            <a:ext cx="3551936" cy="457200"/>
+            <a:off x="1874519" y="3058668"/>
+            <a:ext cx="3064939" cy="457200"/>
           </a:xfrm>
           <a:prstGeom prst="rect">
             <a:avLst/>
@@ -8759,7 +8759,7 @@
         </p:spPr>
         <p:txBody>
           <a:bodyPr wrap="none" lIns="45720" rIns="45720" tIns="18288" bIns="18288" anchor="ctr">
-            <a:spAutoFit/>
+            <a:noAutofit/>
           </a:bodyPr>
           <a:lstStyle/>
           <a:p>
@@ -8778,7 +8778,7 @@
       </p:sp>
       <p:pic>
         <p:nvPicPr>
-          <p:cNvPr id="14" name="Picture 13" descr="e7f3f45c7ca26343.png"/>
+          <p:cNvPr id="14" name="Picture 13" descr="ab0a0f8a819bef4a.png"/>
           <p:cNvPicPr>
             <a:picLocks noChangeAspect="1"/>
           </p:cNvPicPr>
@@ -8792,8 +8792,8 @@
         </p:blipFill>
         <p:spPr>
           <a:xfrm>
-            <a:off x="5289296" y="3008376"/>
-            <a:ext cx="682752" cy="423672"/>
+            <a:off x="4802299" y="3008376"/>
+            <a:ext cx="780288" cy="557784"/>
           </a:xfrm>
           <a:prstGeom prst="rect">
             <a:avLst/>
@@ -8808,8 +8808,8 @@
         </p:nvSpPr>
         <p:spPr>
           <a:xfrm>
-            <a:off x="1874519" y="3610356"/>
-            <a:ext cx="2488692" cy="457200"/>
+            <a:off x="1874519" y="3744468"/>
+            <a:ext cx="2190435" cy="457200"/>
           </a:xfrm>
           <a:prstGeom prst="rect">
             <a:avLst/>
@@ -8818,7 +8818,7 @@
         </p:spPr>
         <p:txBody>
           <a:bodyPr wrap="none" lIns="45720" rIns="45720" tIns="18288" bIns="18288" anchor="ctr">
-            <a:spAutoFit/>
+            <a:noAutofit/>
           </a:bodyPr>
           <a:lstStyle/>
           <a:p>
@@ -8851,7 +8851,7 @@
         </p:blipFill>
         <p:spPr>
           <a:xfrm>
-            <a:off x="4226051" y="3700272"/>
+            <a:off x="3927795" y="3834384"/>
             <a:ext cx="432816" cy="277368"/>
           </a:xfrm>
           <a:prstGeom prst="rect">
@@ -8867,8 +8867,8 @@
         </p:nvSpPr>
         <p:spPr>
           <a:xfrm>
-            <a:off x="4658868" y="3610356"/>
-            <a:ext cx="1425448" cy="457200"/>
+            <a:off x="4360611" y="3744468"/>
+            <a:ext cx="1328762" cy="457200"/>
           </a:xfrm>
           <a:prstGeom prst="rect">
             <a:avLst/>
@@ -8877,7 +8877,7 @@
         </p:spPr>
         <p:txBody>
           <a:bodyPr wrap="none" lIns="45720" rIns="45720" tIns="18288" bIns="18288" anchor="ctr">
-            <a:spAutoFit/>
+            <a:noAutofit/>
           </a:bodyPr>
           <a:lstStyle/>
           <a:p>
@@ -8910,7 +8910,7 @@
         </p:blipFill>
         <p:spPr>
           <a:xfrm>
-            <a:off x="5947156" y="3724656"/>
+            <a:off x="5552213" y="3858768"/>
             <a:ext cx="621792" cy="228600"/>
           </a:xfrm>
           <a:prstGeom prst="rect">
@@ -8926,8 +8926,8 @@
         </p:nvSpPr>
         <p:spPr>
           <a:xfrm>
-            <a:off x="6568947" y="3610356"/>
-            <a:ext cx="362204" cy="457200"/>
+            <a:off x="6174005" y="3744468"/>
+            <a:ext cx="296395" cy="457200"/>
           </a:xfrm>
           <a:prstGeom prst="rect">
             <a:avLst/>
@@ -8936,7 +8936,7 @@
         </p:spPr>
         <p:txBody>
           <a:bodyPr wrap="none" lIns="45720" rIns="45720" tIns="18288" bIns="18288" anchor="ctr">
-            <a:spAutoFit/>
+            <a:noAutofit/>
           </a:bodyPr>
           <a:lstStyle/>
           <a:p>
@@ -10503,8 +10503,8 @@
         </p:nvSpPr>
         <p:spPr>
           <a:xfrm>
-            <a:off x="2373375" y="2221991"/>
-            <a:ext cx="1927352" cy="457200"/>
+            <a:off x="2567790" y="2302764"/>
+            <a:ext cx="1864823" cy="457200"/>
           </a:xfrm>
           <a:prstGeom prst="rect">
             <a:avLst/>
@@ -10513,7 +10513,7 @@
         </p:spPr>
         <p:txBody>
           <a:bodyPr wrap="none" lIns="45720" rIns="45720" tIns="18288" bIns="18288" anchor="ctr">
-            <a:spAutoFit/>
+            <a:noAutofit/>
           </a:bodyPr>
           <a:lstStyle/>
           <a:p>
@@ -10532,7 +10532,7 @@
       </p:sp>
       <p:pic>
         <p:nvPicPr>
-          <p:cNvPr id="10" name="Picture 9" descr="9d164b63d834f8e6.png"/>
+          <p:cNvPr id="10" name="Picture 9" descr="0c3f0450f52693a1.png"/>
           <p:cNvPicPr>
             <a:picLocks noChangeAspect="1"/>
           </p:cNvPicPr>
@@ -10546,8 +10546,8 @@
         </p:blipFill>
         <p:spPr>
           <a:xfrm>
-            <a:off x="4163567" y="2194560"/>
-            <a:ext cx="829056" cy="512064"/>
+            <a:off x="4295453" y="2194560"/>
+            <a:ext cx="890016" cy="673608"/>
           </a:xfrm>
           <a:prstGeom prst="rect">
             <a:avLst/>
@@ -10562,8 +10562,8 @@
         </p:nvSpPr>
         <p:spPr>
           <a:xfrm>
-            <a:off x="4992623" y="2221991"/>
-            <a:ext cx="1583944" cy="457200"/>
+            <a:off x="5185469" y="2302764"/>
+            <a:ext cx="1474477" cy="457200"/>
           </a:xfrm>
           <a:prstGeom prst="rect">
             <a:avLst/>
@@ -10572,7 +10572,7 @@
         </p:spPr>
         <p:txBody>
           <a:bodyPr wrap="none" lIns="45720" rIns="45720" tIns="18288" bIns="18288" anchor="ctr">
-            <a:spAutoFit/>
+            <a:noAutofit/>
           </a:bodyPr>
           <a:lstStyle/>
           <a:p>
@@ -10605,7 +10605,7 @@
         </p:blipFill>
         <p:spPr>
           <a:xfrm>
-            <a:off x="6439408" y="2310383"/>
+            <a:off x="6522787" y="2391156"/>
             <a:ext cx="1082040" cy="280416"/>
           </a:xfrm>
           <a:prstGeom prst="rect">
@@ -10621,8 +10621,8 @@
         </p:nvSpPr>
         <p:spPr>
           <a:xfrm>
-            <a:off x="7521448" y="2221991"/>
-            <a:ext cx="1412240" cy="457200"/>
+            <a:off x="7604827" y="2302764"/>
+            <a:ext cx="1208866" cy="457200"/>
           </a:xfrm>
           <a:prstGeom prst="rect">
             <a:avLst/>
@@ -10631,7 +10631,7 @@
         </p:spPr>
         <p:txBody>
           <a:bodyPr wrap="none" lIns="45720" rIns="45720" tIns="18288" bIns="18288" anchor="ctr">
-            <a:spAutoFit/>
+            <a:noAutofit/>
           </a:bodyPr>
           <a:lstStyle/>
           <a:p>
@@ -10664,7 +10664,7 @@
         </p:blipFill>
         <p:spPr>
           <a:xfrm>
-            <a:off x="8796528" y="2310383"/>
+            <a:off x="8676533" y="2391156"/>
             <a:ext cx="746760" cy="280416"/>
           </a:xfrm>
           <a:prstGeom prst="rect">
@@ -10680,8 +10680,8 @@
         </p:nvSpPr>
         <p:spPr>
           <a:xfrm>
-            <a:off x="9543288" y="2221991"/>
-            <a:ext cx="382016" cy="457200"/>
+            <a:off x="9423293" y="2302764"/>
+            <a:ext cx="307595" cy="457200"/>
           </a:xfrm>
           <a:prstGeom prst="rect">
             <a:avLst/>
@@ -10690,7 +10690,7 @@
         </p:spPr>
         <p:txBody>
           <a:bodyPr wrap="none" lIns="45720" rIns="45720" tIns="18288" bIns="18288" anchor="ctr">
-            <a:spAutoFit/>
+            <a:noAutofit/>
           </a:bodyPr>
           <a:lstStyle/>
           <a:p>
@@ -10715,7 +10715,7 @@
         </p:nvSpPr>
         <p:spPr>
           <a:xfrm>
-            <a:off x="777240" y="2980944"/>
+            <a:off x="777240" y="3142488"/>
             <a:ext cx="10607040" cy="465151"/>
           </a:xfrm>
           <a:prstGeom prst="rect">
@@ -10750,7 +10750,7 @@
         </p:nvSpPr>
         <p:spPr>
           <a:xfrm>
-            <a:off x="1874519" y="3647263"/>
+            <a:off x="1874519" y="3808807"/>
             <a:ext cx="4572000" cy="548640"/>
           </a:xfrm>
           <a:prstGeom prst="rect">
@@ -10794,7 +10794,7 @@
         </p:nvSpPr>
         <p:spPr>
           <a:xfrm>
-            <a:off x="6629400" y="3647263"/>
+            <a:off x="6629400" y="3808807"/>
             <a:ext cx="4572000" cy="548640"/>
           </a:xfrm>
           <a:prstGeom prst="rect">
@@ -10825,6 +10825,94 @@
                 </a:solidFill>
                 <a:latin typeface="Century Schoolbook"/>
               </a:rPr>
+              <a:t>120</a:t>
+            </a:r>
+          </a:p>
+        </p:txBody>
+      </p:sp>
+      <p:sp>
+        <p:nvSpPr>
+          <p:cNvPr id="19" name="TextBox 18"/>
+          <p:cNvSpPr txBox="1"/>
+          <p:nvPr/>
+        </p:nvSpPr>
+        <p:spPr>
+          <a:xfrm>
+            <a:off x="1874519" y="4494607"/>
+            <a:ext cx="4572000" cy="548640"/>
+          </a:xfrm>
+          <a:prstGeom prst="rect">
+            <a:avLst/>
+          </a:prstGeom>
+          <a:noFill/>
+        </p:spPr>
+        <p:txBody>
+          <a:bodyPr wrap="square" lIns="45720" rIns="45720" tIns="18288" bIns="18288" anchor="t">
+            <a:spAutoFit/>
+          </a:bodyPr>
+          <a:lstStyle/>
+          <a:p>
+            <a:pPr algn="l"/>
+            <a:r>
+              <a:rPr sz="2400" b="1" i="0">
+                <a:solidFill>
+                  <a:srgbClr val="1A1A1A"/>
+                </a:solidFill>
+                <a:latin typeface="Century Schoolbook"/>
+              </a:rPr>
+              <a:t>C.   </a:t>
+            </a:r>
+            <a:r>
+              <a:rPr sz="2400" b="0" i="0">
+                <a:solidFill>
+                  <a:srgbClr val="1A1A1A"/>
+                </a:solidFill>
+                <a:latin typeface="Century Schoolbook"/>
+              </a:rPr>
+              <a:t>360</a:t>
+            </a:r>
+          </a:p>
+        </p:txBody>
+      </p:sp>
+      <p:sp>
+        <p:nvSpPr>
+          <p:cNvPr id="20" name="TextBox 19"/>
+          <p:cNvSpPr txBox="1"/>
+          <p:nvPr/>
+        </p:nvSpPr>
+        <p:spPr>
+          <a:xfrm>
+            <a:off x="6629400" y="4494607"/>
+            <a:ext cx="4572000" cy="548640"/>
+          </a:xfrm>
+          <a:prstGeom prst="rect">
+            <a:avLst/>
+          </a:prstGeom>
+          <a:noFill/>
+        </p:spPr>
+        <p:txBody>
+          <a:bodyPr wrap="square" lIns="45720" rIns="45720" tIns="18288" bIns="18288" anchor="t">
+            <a:spAutoFit/>
+          </a:bodyPr>
+          <a:lstStyle/>
+          <a:p>
+            <a:pPr algn="l"/>
+            <a:r>
+              <a:rPr sz="2400" b="1" i="0">
+                <a:solidFill>
+                  <a:srgbClr val="1A1A1A"/>
+                </a:solidFill>
+                <a:latin typeface="Century Schoolbook"/>
+              </a:rPr>
+              <a:t>D.   </a:t>
+            </a:r>
+            <a:r>
+              <a:rPr sz="2400" b="0" i="0">
+                <a:solidFill>
+                  <a:srgbClr val="1A1A1A"/>
+                </a:solidFill>
+                <a:latin typeface="Century Schoolbook"/>
+              </a:rPr>
               <a:t>3,600</a:t>
             </a:r>
           </a:p>
@@ -10832,101 +10920,13 @@
       </p:sp>
       <p:sp>
         <p:nvSpPr>
-          <p:cNvPr id="19" name="TextBox 18"/>
-          <p:cNvSpPr txBox="1"/>
-          <p:nvPr/>
-        </p:nvSpPr>
-        <p:spPr>
-          <a:xfrm>
-            <a:off x="1874519" y="4333063"/>
-            <a:ext cx="4572000" cy="548640"/>
-          </a:xfrm>
-          <a:prstGeom prst="rect">
-            <a:avLst/>
-          </a:prstGeom>
-          <a:noFill/>
-        </p:spPr>
-        <p:txBody>
-          <a:bodyPr wrap="square" lIns="45720" rIns="45720" tIns="18288" bIns="18288" anchor="t">
-            <a:spAutoFit/>
-          </a:bodyPr>
-          <a:lstStyle/>
-          <a:p>
-            <a:pPr algn="l"/>
-            <a:r>
-              <a:rPr sz="2400" b="1" i="0">
-                <a:solidFill>
-                  <a:srgbClr val="1A1A1A"/>
-                </a:solidFill>
-                <a:latin typeface="Century Schoolbook"/>
-              </a:rPr>
-              <a:t>C.   </a:t>
-            </a:r>
-            <a:r>
-              <a:rPr sz="2400" b="0" i="0">
-                <a:solidFill>
-                  <a:srgbClr val="1A1A1A"/>
-                </a:solidFill>
-                <a:latin typeface="Century Schoolbook"/>
-              </a:rPr>
-              <a:t>120</a:t>
-            </a:r>
-          </a:p>
-        </p:txBody>
-      </p:sp>
-      <p:sp>
-        <p:nvSpPr>
-          <p:cNvPr id="20" name="TextBox 19"/>
-          <p:cNvSpPr txBox="1"/>
-          <p:nvPr/>
-        </p:nvSpPr>
-        <p:spPr>
-          <a:xfrm>
-            <a:off x="6629400" y="4333063"/>
-            <a:ext cx="4572000" cy="548640"/>
-          </a:xfrm>
-          <a:prstGeom prst="rect">
-            <a:avLst/>
-          </a:prstGeom>
-          <a:noFill/>
-        </p:spPr>
-        <p:txBody>
-          <a:bodyPr wrap="square" lIns="45720" rIns="45720" tIns="18288" bIns="18288" anchor="t">
-            <a:spAutoFit/>
-          </a:bodyPr>
-          <a:lstStyle/>
-          <a:p>
-            <a:pPr algn="l"/>
-            <a:r>
-              <a:rPr sz="2400" b="1" i="0">
-                <a:solidFill>
-                  <a:srgbClr val="1A1A1A"/>
-                </a:solidFill>
-                <a:latin typeface="Century Schoolbook"/>
-              </a:rPr>
-              <a:t>D.   </a:t>
-            </a:r>
-            <a:r>
-              <a:rPr sz="2400" b="0" i="0">
-                <a:solidFill>
-                  <a:srgbClr val="1A1A1A"/>
-                </a:solidFill>
-                <a:latin typeface="Century Schoolbook"/>
-              </a:rPr>
-              <a:t>360</a:t>
-            </a:r>
-          </a:p>
-        </p:txBody>
-      </p:sp>
-      <p:sp>
-        <p:nvSpPr>
           <p:cNvPr id="21" name="TextBox 20"/>
           <p:cNvSpPr txBox="1"/>
           <p:nvPr/>
         </p:nvSpPr>
         <p:spPr>
           <a:xfrm>
-            <a:off x="777240" y="5338903"/>
+            <a:off x="777240" y="5500447"/>
             <a:ext cx="10607040" cy="457200"/>
           </a:xfrm>
           <a:prstGeom prst="rect">
@@ -11224,8 +11224,8 @@
         </p:nvSpPr>
         <p:spPr>
           <a:xfrm>
-            <a:off x="2373375" y="2130552"/>
-            <a:ext cx="1927352" cy="457200"/>
+            <a:off x="2566266" y="2211323"/>
+            <a:ext cx="1864823" cy="457200"/>
           </a:xfrm>
           <a:prstGeom prst="rect">
             <a:avLst/>
@@ -11234,7 +11234,7 @@
         </p:spPr>
         <p:txBody>
           <a:bodyPr wrap="none" lIns="45720" rIns="45720" tIns="18288" bIns="18288" anchor="ctr">
-            <a:spAutoFit/>
+            <a:noAutofit/>
           </a:bodyPr>
           <a:lstStyle/>
           <a:p>
@@ -11253,7 +11253,7 @@
       </p:sp>
       <p:pic>
         <p:nvPicPr>
-          <p:cNvPr id="10" name="Picture 9" descr="9d164b63d834f8e6.png"/>
+          <p:cNvPr id="10" name="Picture 9" descr="9a895d34bc456d65.png"/>
           <p:cNvPicPr>
             <a:picLocks noChangeAspect="1"/>
           </p:cNvPicPr>
@@ -11267,8 +11267,8 @@
         </p:blipFill>
         <p:spPr>
           <a:xfrm>
-            <a:off x="4163567" y="2103120"/>
-            <a:ext cx="829056" cy="512064"/>
+            <a:off x="4293929" y="2103120"/>
+            <a:ext cx="893064" cy="673608"/>
           </a:xfrm>
           <a:prstGeom prst="rect">
             <a:avLst/>
@@ -11283,8 +11283,8 @@
         </p:nvSpPr>
         <p:spPr>
           <a:xfrm>
-            <a:off x="4992623" y="2130552"/>
-            <a:ext cx="1583944" cy="457200"/>
+            <a:off x="5186993" y="2211323"/>
+            <a:ext cx="1474477" cy="457200"/>
           </a:xfrm>
           <a:prstGeom prst="rect">
             <a:avLst/>
@@ -11293,7 +11293,7 @@
         </p:spPr>
         <p:txBody>
           <a:bodyPr wrap="none" lIns="45720" rIns="45720" tIns="18288" bIns="18288" anchor="ctr">
-            <a:spAutoFit/>
+            <a:noAutofit/>
           </a:bodyPr>
           <a:lstStyle/>
           <a:p>
@@ -11326,7 +11326,7 @@
         </p:blipFill>
         <p:spPr>
           <a:xfrm>
-            <a:off x="6439408" y="2218944"/>
+            <a:off x="6524311" y="2299715"/>
             <a:ext cx="1082040" cy="280416"/>
           </a:xfrm>
           <a:prstGeom prst="rect">
@@ -11342,8 +11342,8 @@
         </p:nvSpPr>
         <p:spPr>
           <a:xfrm>
-            <a:off x="7521448" y="2130552"/>
-            <a:ext cx="1412240" cy="457200"/>
+            <a:off x="7606351" y="2211323"/>
+            <a:ext cx="1208866" cy="457200"/>
           </a:xfrm>
           <a:prstGeom prst="rect">
             <a:avLst/>
@@ -11352,7 +11352,7 @@
         </p:spPr>
         <p:txBody>
           <a:bodyPr wrap="none" lIns="45720" rIns="45720" tIns="18288" bIns="18288" anchor="ctr">
-            <a:spAutoFit/>
+            <a:noAutofit/>
           </a:bodyPr>
           <a:lstStyle/>
           <a:p>
@@ -11385,7 +11385,7 @@
         </p:blipFill>
         <p:spPr>
           <a:xfrm>
-            <a:off x="8796528" y="2218944"/>
+            <a:off x="8678057" y="2299715"/>
             <a:ext cx="746760" cy="280416"/>
           </a:xfrm>
           <a:prstGeom prst="rect">
@@ -11401,8 +11401,8 @@
         </p:nvSpPr>
         <p:spPr>
           <a:xfrm>
-            <a:off x="9543288" y="2130552"/>
-            <a:ext cx="382016" cy="457200"/>
+            <a:off x="9424817" y="2211323"/>
+            <a:ext cx="307595" cy="457200"/>
           </a:xfrm>
           <a:prstGeom prst="rect">
             <a:avLst/>
@@ -11411,7 +11411,7 @@
         </p:spPr>
         <p:txBody>
           <a:bodyPr wrap="none" lIns="45720" rIns="45720" tIns="18288" bIns="18288" anchor="ctr">
-            <a:spAutoFit/>
+            <a:noAutofit/>
           </a:bodyPr>
           <a:lstStyle/>
           <a:p>
@@ -11436,7 +11436,7 @@
         </p:nvSpPr>
         <p:spPr>
           <a:xfrm>
-            <a:off x="777240" y="2889503"/>
+            <a:off x="777240" y="3051048"/>
             <a:ext cx="10607040" cy="465151"/>
           </a:xfrm>
           <a:prstGeom prst="rect">
@@ -11471,7 +11471,7 @@
         </p:nvSpPr>
         <p:spPr>
           <a:xfrm>
-            <a:off x="1874519" y="3555823"/>
+            <a:off x="1874519" y="3717367"/>
             <a:ext cx="4572000" cy="548640"/>
           </a:xfrm>
           <a:prstGeom prst="rect">
@@ -11515,7 +11515,7 @@
         </p:nvSpPr>
         <p:spPr>
           <a:xfrm>
-            <a:off x="6629400" y="3555823"/>
+            <a:off x="6629400" y="3717367"/>
             <a:ext cx="4572000" cy="548640"/>
           </a:xfrm>
           <a:prstGeom prst="rect">
@@ -11546,6 +11546,94 @@
                 </a:solidFill>
                 <a:latin typeface="Century Schoolbook"/>
               </a:rPr>
+              <a:t>120</a:t>
+            </a:r>
+          </a:p>
+        </p:txBody>
+      </p:sp>
+      <p:sp>
+        <p:nvSpPr>
+          <p:cNvPr id="19" name="TextBox 18"/>
+          <p:cNvSpPr txBox="1"/>
+          <p:nvPr/>
+        </p:nvSpPr>
+        <p:spPr>
+          <a:xfrm>
+            <a:off x="1874519" y="4403167"/>
+            <a:ext cx="4572000" cy="548640"/>
+          </a:xfrm>
+          <a:prstGeom prst="rect">
+            <a:avLst/>
+          </a:prstGeom>
+          <a:noFill/>
+        </p:spPr>
+        <p:txBody>
+          <a:bodyPr wrap="square" lIns="45720" rIns="45720" tIns="18288" bIns="18288" anchor="t">
+            <a:spAutoFit/>
+          </a:bodyPr>
+          <a:lstStyle/>
+          <a:p>
+            <a:pPr algn="l"/>
+            <a:r>
+              <a:rPr sz="2400" b="1" i="0">
+                <a:solidFill>
+                  <a:srgbClr val="1A1A1A"/>
+                </a:solidFill>
+                <a:latin typeface="Century Schoolbook"/>
+              </a:rPr>
+              <a:t>C.   </a:t>
+            </a:r>
+            <a:r>
+              <a:rPr sz="2400" b="0" i="0">
+                <a:solidFill>
+                  <a:srgbClr val="1A1A1A"/>
+                </a:solidFill>
+                <a:latin typeface="Century Schoolbook"/>
+              </a:rPr>
+              <a:t>360</a:t>
+            </a:r>
+          </a:p>
+        </p:txBody>
+      </p:sp>
+      <p:sp>
+        <p:nvSpPr>
+          <p:cNvPr id="20" name="TextBox 19"/>
+          <p:cNvSpPr txBox="1"/>
+          <p:nvPr/>
+        </p:nvSpPr>
+        <p:spPr>
+          <a:xfrm>
+            <a:off x="6629400" y="4403167"/>
+            <a:ext cx="4572000" cy="548640"/>
+          </a:xfrm>
+          <a:prstGeom prst="rect">
+            <a:avLst/>
+          </a:prstGeom>
+          <a:noFill/>
+        </p:spPr>
+        <p:txBody>
+          <a:bodyPr wrap="square" lIns="45720" rIns="45720" tIns="18288" bIns="18288" anchor="t">
+            <a:spAutoFit/>
+          </a:bodyPr>
+          <a:lstStyle/>
+          <a:p>
+            <a:pPr algn="l"/>
+            <a:r>
+              <a:rPr sz="2400" b="1" i="0">
+                <a:solidFill>
+                  <a:srgbClr val="1A1A1A"/>
+                </a:solidFill>
+                <a:latin typeface="Century Schoolbook"/>
+              </a:rPr>
+              <a:t>D.   </a:t>
+            </a:r>
+            <a:r>
+              <a:rPr sz="2400" b="0" i="0">
+                <a:solidFill>
+                  <a:srgbClr val="1A1A1A"/>
+                </a:solidFill>
+                <a:latin typeface="Century Schoolbook"/>
+              </a:rPr>
               <a:t>3,600</a:t>
             </a:r>
           </a:p>
@@ -11553,101 +11641,13 @@
       </p:sp>
       <p:sp>
         <p:nvSpPr>
-          <p:cNvPr id="19" name="TextBox 18"/>
-          <p:cNvSpPr txBox="1"/>
-          <p:nvPr/>
-        </p:nvSpPr>
-        <p:spPr>
-          <a:xfrm>
-            <a:off x="1874519" y="4241623"/>
-            <a:ext cx="4572000" cy="548640"/>
-          </a:xfrm>
-          <a:prstGeom prst="rect">
-            <a:avLst/>
-          </a:prstGeom>
-          <a:noFill/>
-        </p:spPr>
-        <p:txBody>
-          <a:bodyPr wrap="square" lIns="45720" rIns="45720" tIns="18288" bIns="18288" anchor="t">
-            <a:spAutoFit/>
-          </a:bodyPr>
-          <a:lstStyle/>
-          <a:p>
-            <a:pPr algn="l"/>
-            <a:r>
-              <a:rPr sz="2400" b="1" i="0">
-                <a:solidFill>
-                  <a:srgbClr val="1A1A1A"/>
-                </a:solidFill>
-                <a:latin typeface="Century Schoolbook"/>
-              </a:rPr>
-              <a:t>C.   </a:t>
-            </a:r>
-            <a:r>
-              <a:rPr sz="2400" b="0" i="0">
-                <a:solidFill>
-                  <a:srgbClr val="1A1A1A"/>
-                </a:solidFill>
-                <a:latin typeface="Century Schoolbook"/>
-              </a:rPr>
-              <a:t>120</a:t>
-            </a:r>
-          </a:p>
-        </p:txBody>
-      </p:sp>
-      <p:sp>
-        <p:nvSpPr>
-          <p:cNvPr id="20" name="TextBox 19"/>
-          <p:cNvSpPr txBox="1"/>
-          <p:nvPr/>
-        </p:nvSpPr>
-        <p:spPr>
-          <a:xfrm>
-            <a:off x="6629400" y="4241623"/>
-            <a:ext cx="4572000" cy="548640"/>
-          </a:xfrm>
-          <a:prstGeom prst="rect">
-            <a:avLst/>
-          </a:prstGeom>
-          <a:noFill/>
-        </p:spPr>
-        <p:txBody>
-          <a:bodyPr wrap="square" lIns="45720" rIns="45720" tIns="18288" bIns="18288" anchor="t">
-            <a:spAutoFit/>
-          </a:bodyPr>
-          <a:lstStyle/>
-          <a:p>
-            <a:pPr algn="l"/>
-            <a:r>
-              <a:rPr sz="2400" b="1" i="0">
-                <a:solidFill>
-                  <a:srgbClr val="1A1A1A"/>
-                </a:solidFill>
-                <a:latin typeface="Century Schoolbook"/>
-              </a:rPr>
-              <a:t>D.   </a:t>
-            </a:r>
-            <a:r>
-              <a:rPr sz="2400" b="0" i="0">
-                <a:solidFill>
-                  <a:srgbClr val="1A1A1A"/>
-                </a:solidFill>
-                <a:latin typeface="Century Schoolbook"/>
-              </a:rPr>
-              <a:t>360</a:t>
-            </a:r>
-          </a:p>
-        </p:txBody>
-      </p:sp>
-      <p:sp>
-        <p:nvSpPr>
           <p:cNvPr id="21" name="TextBox 20"/>
           <p:cNvSpPr txBox="1"/>
           <p:nvPr/>
         </p:nvSpPr>
         <p:spPr>
           <a:xfrm>
-            <a:off x="777240" y="5247463"/>
+            <a:off x="777240" y="5409007"/>
             <a:ext cx="10607040" cy="548640"/>
           </a:xfrm>
           <a:prstGeom prst="rect">
@@ -12081,25 +12081,7 @@
                 </a:solidFill>
                 <a:latin typeface="Century Schoolbook"/>
               </a:rPr>
-              <a:t>12</a:t>
-            </a:r>
-            <a:r>
-              <a:rPr sz="2400" b="0" i="0" baseline="30000">
-                <a:solidFill>
-                  <a:srgbClr val="1A1A1A"/>
-                </a:solidFill>
-                <a:latin typeface="Century Schoolbook"/>
-              </a:rPr>
-              <a:t>2</a:t>
-            </a:r>
-            <a:r>
-              <a:rPr sz="2400" b="0" i="0">
-                <a:solidFill>
-                  <a:srgbClr val="1A1A1A"/>
-                </a:solidFill>
-                <a:latin typeface="Century Schoolbook"/>
-              </a:rPr>
-              <a:t>(1.25) + 38</a:t>
+              <a:t>12(1.25) + 38</a:t>
             </a:r>
           </a:p>
         </p:txBody>
@@ -12161,7 +12143,7 @@
                 </a:solidFill>
                 <a:latin typeface="Century Schoolbook"/>
               </a:rPr>
-              <a:t>(1.25 + 38)</a:t>
+              <a:t> + 1.25 + 38</a:t>
             </a:r>
           </a:p>
         </p:txBody>
@@ -12205,7 +12187,25 @@
                 </a:solidFill>
                 <a:latin typeface="Century Schoolbook"/>
               </a:rPr>
-              <a:t>12(1.25) + 38</a:t>
+              <a:t>12</a:t>
+            </a:r>
+            <a:r>
+              <a:rPr sz="2400" b="0" i="0" baseline="30000">
+                <a:solidFill>
+                  <a:srgbClr val="1A1A1A"/>
+                </a:solidFill>
+                <a:latin typeface="Century Schoolbook"/>
+              </a:rPr>
+              <a:t>2</a:t>
+            </a:r>
+            <a:r>
+              <a:rPr sz="2400" b="0" i="0">
+                <a:solidFill>
+                  <a:srgbClr val="1A1A1A"/>
+                </a:solidFill>
+                <a:latin typeface="Century Schoolbook"/>
+              </a:rPr>
+              <a:t>(1.25 + 38)</a:t>
             </a:r>
           </a:p>
         </p:txBody>
@@ -12267,7 +12267,7 @@
                 </a:solidFill>
                 <a:latin typeface="Century Schoolbook"/>
               </a:rPr>
-              <a:t> + 1.25 + 38</a:t>
+              <a:t>(1.25) + 38</a:t>
             </a:r>
           </a:p>
         </p:txBody>
@@ -12701,38 +12701,20 @@
             <a:r>
               <a:rPr sz="2400" b="1" i="0">
                 <a:solidFill>
-                  <a:srgbClr val="9E1B32"/>
+                  <a:srgbClr val="1A1A1A"/>
                 </a:solidFill>
                 <a:latin typeface="Century Schoolbook"/>
               </a:rPr>
               <a:t>A.   </a:t>
             </a:r>
             <a:r>
-              <a:rPr sz="2400" b="1" i="0">
-                <a:solidFill>
-                  <a:srgbClr val="9E1B32"/>
-                </a:solidFill>
-                <a:latin typeface="Century Schoolbook"/>
-              </a:rPr>
-              <a:t>12</a:t>
-            </a:r>
-            <a:r>
-              <a:rPr sz="2400" b="1" i="0" baseline="30000">
-                <a:solidFill>
-                  <a:srgbClr val="9E1B32"/>
-                </a:solidFill>
-                <a:latin typeface="Century Schoolbook"/>
-              </a:rPr>
-              <a:t>2</a:t>
-            </a:r>
-            <a:r>
-              <a:rPr sz="2400" b="1" i="0">
-                <a:solidFill>
-                  <a:srgbClr val="9E1B32"/>
-                </a:solidFill>
-                <a:latin typeface="Century Schoolbook"/>
-              </a:rPr>
-              <a:t>(1.25) + 38</a:t>
+              <a:rPr sz="2400" b="0" i="0">
+                <a:solidFill>
+                  <a:srgbClr val="1A1A1A"/>
+                </a:solidFill>
+                <a:latin typeface="Century Schoolbook"/>
+              </a:rPr>
+              <a:t>12(1.25) + 38</a:t>
             </a:r>
           </a:p>
         </p:txBody>
@@ -12794,7 +12776,7 @@
                 </a:solidFill>
                 <a:latin typeface="Century Schoolbook"/>
               </a:rPr>
-              <a:t>(1.25 + 38)</a:t>
+              <a:t> + 1.25 + 38</a:t>
             </a:r>
           </a:p>
         </p:txBody>
@@ -12838,7 +12820,25 @@
                 </a:solidFill>
                 <a:latin typeface="Century Schoolbook"/>
               </a:rPr>
-              <a:t>12(1.25) + 38</a:t>
+              <a:t>12</a:t>
+            </a:r>
+            <a:r>
+              <a:rPr sz="2400" b="0" i="0" baseline="30000">
+                <a:solidFill>
+                  <a:srgbClr val="1A1A1A"/>
+                </a:solidFill>
+                <a:latin typeface="Century Schoolbook"/>
+              </a:rPr>
+              <a:t>2</a:t>
+            </a:r>
+            <a:r>
+              <a:rPr sz="2400" b="0" i="0">
+                <a:solidFill>
+                  <a:srgbClr val="1A1A1A"/>
+                </a:solidFill>
+                <a:latin typeface="Century Schoolbook"/>
+              </a:rPr>
+              <a:t>(1.25 + 38)</a:t>
             </a:r>
           </a:p>
         </p:txBody>
@@ -12869,38 +12869,38 @@
             <a:r>
               <a:rPr sz="2400" b="1" i="0">
                 <a:solidFill>
-                  <a:srgbClr val="1A1A1A"/>
+                  <a:srgbClr val="9E1B32"/>
                 </a:solidFill>
                 <a:latin typeface="Century Schoolbook"/>
               </a:rPr>
               <a:t>D.   </a:t>
             </a:r>
             <a:r>
-              <a:rPr sz="2400" b="0" i="0">
-                <a:solidFill>
-                  <a:srgbClr val="1A1A1A"/>
+              <a:rPr sz="2400" b="1" i="0">
+                <a:solidFill>
+                  <a:srgbClr val="9E1B32"/>
                 </a:solidFill>
                 <a:latin typeface="Century Schoolbook"/>
               </a:rPr>
               <a:t>12</a:t>
             </a:r>
             <a:r>
-              <a:rPr sz="2400" b="0" i="0" baseline="30000">
-                <a:solidFill>
-                  <a:srgbClr val="1A1A1A"/>
+              <a:rPr sz="2400" b="1" i="0" baseline="30000">
+                <a:solidFill>
+                  <a:srgbClr val="9E1B32"/>
                 </a:solidFill>
                 <a:latin typeface="Century Schoolbook"/>
               </a:rPr>
               <a:t>2</a:t>
             </a:r>
             <a:r>
-              <a:rPr sz="2400" b="0" i="0">
-                <a:solidFill>
-                  <a:srgbClr val="1A1A1A"/>
-                </a:solidFill>
-                <a:latin typeface="Century Schoolbook"/>
-              </a:rPr>
-              <a:t> + 1.25 + 38</a:t>
+              <a:rPr sz="2400" b="1" i="0">
+                <a:solidFill>
+                  <a:srgbClr val="9E1B32"/>
+                </a:solidFill>
+                <a:latin typeface="Century Schoolbook"/>
+              </a:rPr>
+              <a:t>(1.25) + 38</a:t>
             </a:r>
           </a:p>
         </p:txBody>
@@ -12935,7 +12935,7 @@
                 </a:solidFill>
                 <a:latin typeface="Century Schoolbook"/>
               </a:rPr>
-              <a:t>Answer:   A — 12</a:t>
+              <a:t>Answer:   D — 12</a:t>
             </a:r>
             <a:r>
               <a:rPr sz="3200" b="1" i="0" baseline="30000">
@@ -13229,8 +13229,8 @@
         </p:nvSpPr>
         <p:spPr>
           <a:xfrm>
-            <a:off x="1532635" y="2217420"/>
-            <a:ext cx="6048248" cy="457200"/>
+            <a:off x="1986309" y="2217420"/>
+            <a:ext cx="5538161" cy="457200"/>
           </a:xfrm>
           <a:prstGeom prst="rect">
             <a:avLst/>
@@ -13239,7 +13239,7 @@
         </p:spPr>
         <p:txBody>
           <a:bodyPr wrap="none" lIns="45720" rIns="45720" tIns="18288" bIns="18288" anchor="ctr">
-            <a:spAutoFit/>
+            <a:noAutofit/>
           </a:bodyPr>
           <a:lstStyle/>
           <a:p>
@@ -13272,7 +13272,7 @@
         </p:blipFill>
         <p:spPr>
           <a:xfrm>
-            <a:off x="7443724" y="2194560"/>
+            <a:off x="7387310" y="2194560"/>
             <a:ext cx="1051560" cy="502920"/>
           </a:xfrm>
           <a:prstGeom prst="rect">
@@ -13288,8 +13288,8 @@
         </p:nvSpPr>
         <p:spPr>
           <a:xfrm>
-            <a:off x="8495284" y="2217420"/>
-            <a:ext cx="2270760" cy="457200"/>
+            <a:off x="8438870" y="2217420"/>
+            <a:ext cx="1873500" cy="457200"/>
           </a:xfrm>
           <a:prstGeom prst="rect">
             <a:avLst/>
@@ -13298,7 +13298,7 @@
         </p:spPr>
         <p:txBody>
           <a:bodyPr wrap="none" lIns="45720" rIns="45720" tIns="18288" bIns="18288" anchor="ctr">
-            <a:spAutoFit/>
+            <a:noAutofit/>
           </a:bodyPr>
           <a:lstStyle/>
           <a:p>
@@ -13691,8 +13691,8 @@
         </p:nvSpPr>
         <p:spPr>
           <a:xfrm>
-            <a:off x="1532635" y="2125979"/>
-            <a:ext cx="6048248" cy="457200"/>
+            <a:off x="1990881" y="2125979"/>
+            <a:ext cx="5538161" cy="457200"/>
           </a:xfrm>
           <a:prstGeom prst="rect">
             <a:avLst/>
@@ -13701,7 +13701,7 @@
         </p:spPr>
         <p:txBody>
           <a:bodyPr wrap="none" lIns="45720" rIns="45720" tIns="18288" bIns="18288" anchor="ctr">
-            <a:spAutoFit/>
+            <a:noAutofit/>
           </a:bodyPr>
           <a:lstStyle/>
           <a:p>
@@ -13720,7 +13720,7 @@
       </p:sp>
       <p:pic>
         <p:nvPicPr>
-          <p:cNvPr id="10" name="Picture 9" descr="68e9635cc791ae9a.png"/>
+          <p:cNvPr id="10" name="Picture 9" descr="12e2a7d6e43363b4.png"/>
           <p:cNvPicPr>
             <a:picLocks noChangeAspect="1"/>
           </p:cNvPicPr>
@@ -13734,8 +13734,8 @@
         </p:blipFill>
         <p:spPr>
           <a:xfrm>
-            <a:off x="7443724" y="2103120"/>
-            <a:ext cx="1051560" cy="502920"/>
+            <a:off x="7391882" y="2103120"/>
+            <a:ext cx="1042415" cy="502920"/>
           </a:xfrm>
           <a:prstGeom prst="rect">
             <a:avLst/>
@@ -13750,8 +13750,8 @@
         </p:nvSpPr>
         <p:spPr>
           <a:xfrm>
-            <a:off x="8495284" y="2125979"/>
-            <a:ext cx="2270760" cy="457200"/>
+            <a:off x="8434298" y="2125979"/>
+            <a:ext cx="1873500" cy="457200"/>
           </a:xfrm>
           <a:prstGeom prst="rect">
             <a:avLst/>
@@ -13760,7 +13760,7 @@
         </p:spPr>
         <p:txBody>
           <a:bodyPr wrap="none" lIns="45720" rIns="45720" tIns="18288" bIns="18288" anchor="ctr">
-            <a:spAutoFit/>
+            <a:noAutofit/>
           </a:bodyPr>
           <a:lstStyle/>
           <a:p>
@@ -14153,8 +14153,8 @@
         </p:nvSpPr>
         <p:spPr>
           <a:xfrm>
-            <a:off x="2251964" y="2214372"/>
-            <a:ext cx="1927352" cy="457200"/>
+            <a:off x="2450603" y="2293620"/>
+            <a:ext cx="1864823" cy="457200"/>
           </a:xfrm>
           <a:prstGeom prst="rect">
             <a:avLst/>
@@ -14163,7 +14163,7 @@
         </p:spPr>
         <p:txBody>
           <a:bodyPr wrap="none" lIns="45720" rIns="45720" tIns="18288" bIns="18288" anchor="ctr">
-            <a:spAutoFit/>
+            <a:noAutofit/>
           </a:bodyPr>
           <a:lstStyle/>
           <a:p>
@@ -14182,7 +14182,7 @@
       </p:sp>
       <p:pic>
         <p:nvPicPr>
-          <p:cNvPr id="10" name="Picture 9" descr="ed90138cce431c85.png"/>
+          <p:cNvPr id="10" name="Picture 9" descr="63c59621754cfcaf.png"/>
           <p:cNvPicPr>
             <a:picLocks noChangeAspect="1"/>
           </p:cNvPicPr>
@@ -14196,8 +14196,8 @@
         </p:blipFill>
         <p:spPr>
           <a:xfrm>
-            <a:off x="4042156" y="2194560"/>
-            <a:ext cx="697992" cy="496824"/>
+            <a:off x="4178266" y="2194560"/>
+            <a:ext cx="993648" cy="655320"/>
           </a:xfrm>
           <a:prstGeom prst="rect">
             <a:avLst/>
@@ -14212,8 +14212,8 @@
         </p:nvSpPr>
         <p:spPr>
           <a:xfrm>
-            <a:off x="4740148" y="2214372"/>
-            <a:ext cx="1583944" cy="457200"/>
+            <a:off x="5171914" y="2293620"/>
+            <a:ext cx="1474477" cy="457200"/>
           </a:xfrm>
           <a:prstGeom prst="rect">
             <a:avLst/>
@@ -14222,7 +14222,7 @@
         </p:spPr>
         <p:txBody>
           <a:bodyPr wrap="none" lIns="45720" rIns="45720" tIns="18288" bIns="18288" anchor="ctr">
-            <a:spAutoFit/>
+            <a:noAutofit/>
           </a:bodyPr>
           <a:lstStyle/>
           <a:p>
@@ -14255,7 +14255,7 @@
         </p:blipFill>
         <p:spPr>
           <a:xfrm>
-            <a:off x="6186932" y="2307336"/>
+            <a:off x="6509232" y="2386584"/>
             <a:ext cx="774192" cy="271272"/>
           </a:xfrm>
           <a:prstGeom prst="rect">
@@ -14271,8 +14271,8 @@
         </p:nvSpPr>
         <p:spPr>
           <a:xfrm>
-            <a:off x="6961124" y="2214372"/>
-            <a:ext cx="725424" cy="457200"/>
+            <a:off x="7283424" y="2293620"/>
+            <a:ext cx="502163" cy="457200"/>
           </a:xfrm>
           <a:prstGeom prst="rect">
             <a:avLst/>
@@ -14281,7 +14281,7 @@
         </p:spPr>
         <p:txBody>
           <a:bodyPr wrap="none" lIns="45720" rIns="45720" tIns="18288" bIns="18288" anchor="ctr">
-            <a:spAutoFit/>
+            <a:noAutofit/>
           </a:bodyPr>
           <a:lstStyle/>
           <a:p>
@@ -14314,7 +14314,7 @@
         </p:blipFill>
         <p:spPr>
           <a:xfrm>
-            <a:off x="7549388" y="2301240"/>
+            <a:off x="7648428" y="2380487"/>
             <a:ext cx="783336" cy="283464"/>
           </a:xfrm>
           <a:prstGeom prst="rect">
@@ -14330,8 +14330,8 @@
         </p:nvSpPr>
         <p:spPr>
           <a:xfrm>
-            <a:off x="8332724" y="2214372"/>
-            <a:ext cx="725424" cy="457200"/>
+            <a:off x="8431764" y="2293620"/>
+            <a:ext cx="502163" cy="457200"/>
           </a:xfrm>
           <a:prstGeom prst="rect">
             <a:avLst/>
@@ -14340,7 +14340,7 @@
         </p:spPr>
         <p:txBody>
           <a:bodyPr wrap="none" lIns="45720" rIns="45720" tIns="18288" bIns="18288" anchor="ctr">
-            <a:spAutoFit/>
+            <a:noAutofit/>
           </a:bodyPr>
           <a:lstStyle/>
           <a:p>
@@ -14373,7 +14373,7 @@
         </p:blipFill>
         <p:spPr>
           <a:xfrm>
-            <a:off x="8920988" y="2301240"/>
+            <a:off x="8796768" y="2380487"/>
             <a:ext cx="743712" cy="283464"/>
           </a:xfrm>
           <a:prstGeom prst="rect">
@@ -14389,8 +14389,8 @@
         </p:nvSpPr>
         <p:spPr>
           <a:xfrm>
-            <a:off x="9664700" y="2214372"/>
-            <a:ext cx="382016" cy="457200"/>
+            <a:off x="9540480" y="2293620"/>
+            <a:ext cx="307595" cy="457200"/>
           </a:xfrm>
           <a:prstGeom prst="rect">
             <a:avLst/>
@@ -14399,7 +14399,7 @@
         </p:spPr>
         <p:txBody>
           <a:bodyPr wrap="none" lIns="45720" rIns="45720" tIns="18288" bIns="18288" anchor="ctr">
-            <a:spAutoFit/>
+            <a:noAutofit/>
           </a:bodyPr>
           <a:lstStyle/>
           <a:p>
@@ -14758,7 +14758,7 @@
         <p:spPr>
           <a:xfrm>
             <a:off x="1874519" y="1760220"/>
-            <a:ext cx="969771" cy="457200"/>
+            <a:ext cx="720605" cy="457200"/>
           </a:xfrm>
           <a:prstGeom prst="rect">
             <a:avLst/>
@@ -14767,7 +14767,7 @@
         </p:spPr>
         <p:txBody>
           <a:bodyPr wrap="none" lIns="45720" rIns="45720" tIns="18288" bIns="18288" anchor="ctr">
-            <a:spAutoFit/>
+            <a:noAutofit/>
           </a:bodyPr>
           <a:lstStyle/>
           <a:p>
@@ -14800,7 +14800,7 @@
         </p:blipFill>
         <p:spPr>
           <a:xfrm>
-            <a:off x="2707132" y="1821180"/>
+            <a:off x="2457965" y="1821180"/>
             <a:ext cx="1554480" cy="335280"/>
           </a:xfrm>
           <a:prstGeom prst="rect">
@@ -14816,8 +14816,8 @@
         </p:nvSpPr>
         <p:spPr>
           <a:xfrm>
-            <a:off x="4810252" y="1760220"/>
-            <a:ext cx="379729" cy="457200"/>
+            <a:off x="4561085" y="1760220"/>
+            <a:ext cx="388052" cy="457200"/>
           </a:xfrm>
           <a:prstGeom prst="rect">
             <a:avLst/>
@@ -14826,7 +14826,7 @@
         </p:spPr>
         <p:txBody>
           <a:bodyPr wrap="none" lIns="45720" rIns="45720" tIns="18288" bIns="18288" anchor="ctr">
-            <a:spAutoFit/>
+            <a:noAutofit/>
           </a:bodyPr>
           <a:lstStyle/>
           <a:p>
@@ -14852,7 +14852,7 @@
         <p:spPr>
           <a:xfrm>
             <a:off x="1874519" y="2372868"/>
-            <a:ext cx="969771" cy="457200"/>
+            <a:ext cx="726811" cy="457200"/>
           </a:xfrm>
           <a:prstGeom prst="rect">
             <a:avLst/>
@@ -14861,7 +14861,7 @@
         </p:spPr>
         <p:txBody>
           <a:bodyPr wrap="none" lIns="45720" rIns="45720" tIns="18288" bIns="18288" anchor="ctr">
-            <a:spAutoFit/>
+            <a:noAutofit/>
           </a:bodyPr>
           <a:lstStyle/>
           <a:p>
@@ -14894,7 +14894,7 @@
         </p:blipFill>
         <p:spPr>
           <a:xfrm>
-            <a:off x="2707132" y="2397252"/>
+            <a:off x="2464171" y="2397252"/>
             <a:ext cx="1588008" cy="408432"/>
           </a:xfrm>
           <a:prstGeom prst="rect">
@@ -14910,8 +14910,8 @@
         </p:nvSpPr>
         <p:spPr>
           <a:xfrm>
-            <a:off x="4843779" y="2372868"/>
-            <a:ext cx="887983" cy="457200"/>
+            <a:off x="4600819" y="2372868"/>
+            <a:ext cx="829616" cy="457200"/>
           </a:xfrm>
           <a:prstGeom prst="rect">
             <a:avLst/>
@@ -14920,7 +14920,7 @@
         </p:spPr>
         <p:txBody>
           <a:bodyPr wrap="none" lIns="45720" rIns="45720" tIns="18288" bIns="18288" anchor="ctr">
-            <a:spAutoFit/>
+            <a:noAutofit/>
           </a:bodyPr>
           <a:lstStyle/>
           <a:p>
@@ -14945,8 +14945,8 @@
         </p:nvSpPr>
         <p:spPr>
           <a:xfrm>
-            <a:off x="1874519" y="2991612"/>
-            <a:ext cx="3551936" cy="457200"/>
+            <a:off x="1874519" y="3058668"/>
+            <a:ext cx="3064939" cy="457200"/>
           </a:xfrm>
           <a:prstGeom prst="rect">
             <a:avLst/>
@@ -14955,7 +14955,7 @@
         </p:spPr>
         <p:txBody>
           <a:bodyPr wrap="none" lIns="45720" rIns="45720" tIns="18288" bIns="18288" anchor="ctr">
-            <a:spAutoFit/>
+            <a:noAutofit/>
           </a:bodyPr>
           <a:lstStyle/>
           <a:p>
@@ -14974,7 +14974,7 @@
       </p:sp>
       <p:pic>
         <p:nvPicPr>
-          <p:cNvPr id="16" name="Picture 15" descr="e7f3f45c7ca26343.png"/>
+          <p:cNvPr id="16" name="Picture 15" descr="ab0a0f8a819bef4a.png"/>
           <p:cNvPicPr>
             <a:picLocks noChangeAspect="1"/>
           </p:cNvPicPr>
@@ -14988,8 +14988,8 @@
         </p:blipFill>
         <p:spPr>
           <a:xfrm>
-            <a:off x="5289296" y="3008376"/>
-            <a:ext cx="682752" cy="423672"/>
+            <a:off x="4802299" y="3008376"/>
+            <a:ext cx="780288" cy="557784"/>
           </a:xfrm>
           <a:prstGeom prst="rect">
             <a:avLst/>
@@ -15004,8 +15004,8 @@
         </p:nvSpPr>
         <p:spPr>
           <a:xfrm>
-            <a:off x="6520688" y="2985516"/>
-            <a:ext cx="718566" cy="457200"/>
+            <a:off x="6131227" y="2985516"/>
+            <a:ext cx="651876" cy="457200"/>
           </a:xfrm>
           <a:prstGeom prst="rect">
             <a:avLst/>
@@ -15014,7 +15014,7 @@
         </p:spPr>
         <p:txBody>
           <a:bodyPr wrap="none" lIns="45720" rIns="45720" tIns="18288" bIns="18288" anchor="ctr">
-            <a:spAutoFit/>
+            <a:noAutofit/>
           </a:bodyPr>
           <a:lstStyle/>
           <a:p>
@@ -15039,8 +15039,8 @@
         </p:nvSpPr>
         <p:spPr>
           <a:xfrm>
-            <a:off x="1874519" y="3610356"/>
-            <a:ext cx="2488692" cy="457200"/>
+            <a:off x="1874519" y="3744468"/>
+            <a:ext cx="2190435" cy="457200"/>
           </a:xfrm>
           <a:prstGeom prst="rect">
             <a:avLst/>
@@ -15049,7 +15049,7 @@
         </p:spPr>
         <p:txBody>
           <a:bodyPr wrap="none" lIns="45720" rIns="45720" tIns="18288" bIns="18288" anchor="ctr">
-            <a:spAutoFit/>
+            <a:noAutofit/>
           </a:bodyPr>
           <a:lstStyle/>
           <a:p>
@@ -15082,7 +15082,7 @@
         </p:blipFill>
         <p:spPr>
           <a:xfrm>
-            <a:off x="4226051" y="3700272"/>
+            <a:off x="3927795" y="3834384"/>
             <a:ext cx="432816" cy="277368"/>
           </a:xfrm>
           <a:prstGeom prst="rect">
@@ -15098,8 +15098,8 @@
         </p:nvSpPr>
         <p:spPr>
           <a:xfrm>
-            <a:off x="4658868" y="3610356"/>
-            <a:ext cx="1425448" cy="457200"/>
+            <a:off x="4360611" y="3744468"/>
+            <a:ext cx="1328762" cy="457200"/>
           </a:xfrm>
           <a:prstGeom prst="rect">
             <a:avLst/>
@@ -15108,7 +15108,7 @@
         </p:spPr>
         <p:txBody>
           <a:bodyPr wrap="none" lIns="45720" rIns="45720" tIns="18288" bIns="18288" anchor="ctr">
-            <a:spAutoFit/>
+            <a:noAutofit/>
           </a:bodyPr>
           <a:lstStyle/>
           <a:p>
@@ -15141,7 +15141,7 @@
         </p:blipFill>
         <p:spPr>
           <a:xfrm>
-            <a:off x="5947156" y="3724656"/>
+            <a:off x="5552213" y="3858768"/>
             <a:ext cx="621792" cy="228600"/>
           </a:xfrm>
           <a:prstGeom prst="rect">
@@ -15157,8 +15157,8 @@
         </p:nvSpPr>
         <p:spPr>
           <a:xfrm>
-            <a:off x="6568947" y="3610356"/>
-            <a:ext cx="362204" cy="457200"/>
+            <a:off x="6174005" y="3744468"/>
+            <a:ext cx="296395" cy="457200"/>
           </a:xfrm>
           <a:prstGeom prst="rect">
             <a:avLst/>
@@ -15167,7 +15167,7 @@
         </p:spPr>
         <p:txBody>
           <a:bodyPr wrap="none" lIns="45720" rIns="45720" tIns="18288" bIns="18288" anchor="ctr">
-            <a:spAutoFit/>
+            <a:noAutofit/>
           </a:bodyPr>
           <a:lstStyle/>
           <a:p>
@@ -15192,8 +15192,8 @@
         </p:nvSpPr>
         <p:spPr>
           <a:xfrm>
-            <a:off x="7342631" y="3610356"/>
-            <a:ext cx="549148" cy="457200"/>
+            <a:off x="6881880" y="3744468"/>
+            <a:ext cx="565792" cy="457200"/>
           </a:xfrm>
           <a:prstGeom prst="rect">
             <a:avLst/>
@@ -15202,7 +15202,7 @@
         </p:spPr>
         <p:txBody>
           <a:bodyPr wrap="none" lIns="45720" rIns="45720" tIns="18288" bIns="18288" anchor="ctr">
-            <a:spAutoFit/>
+            <a:noAutofit/>
           </a:bodyPr>
           <a:lstStyle/>
           <a:p>
@@ -15490,8 +15490,8 @@
         </p:nvSpPr>
         <p:spPr>
           <a:xfrm>
-            <a:off x="2251964" y="2122931"/>
-            <a:ext cx="1927352" cy="457200"/>
+            <a:off x="2450603" y="2200655"/>
+            <a:ext cx="1864823" cy="457200"/>
           </a:xfrm>
           <a:prstGeom prst="rect">
             <a:avLst/>
@@ -15500,7 +15500,7 @@
         </p:spPr>
         <p:txBody>
           <a:bodyPr wrap="none" lIns="45720" rIns="45720" tIns="18288" bIns="18288" anchor="ctr">
-            <a:spAutoFit/>
+            <a:noAutofit/>
           </a:bodyPr>
           <a:lstStyle/>
           <a:p>
@@ -15519,7 +15519,7 @@
       </p:sp>
       <p:pic>
         <p:nvPicPr>
-          <p:cNvPr id="10" name="Picture 9" descr="ed90138cce431c85.png"/>
+          <p:cNvPr id="10" name="Picture 9" descr="e228efb5a3a6a777.png"/>
           <p:cNvPicPr>
             <a:picLocks noChangeAspect="1"/>
           </p:cNvPicPr>
@@ -15533,8 +15533,8 @@
         </p:blipFill>
         <p:spPr>
           <a:xfrm>
-            <a:off x="4042156" y="2103120"/>
-            <a:ext cx="697992" cy="496824"/>
+            <a:off x="4178266" y="2103120"/>
+            <a:ext cx="987552" cy="652272"/>
           </a:xfrm>
           <a:prstGeom prst="rect">
             <a:avLst/>
@@ -15549,8 +15549,8 @@
         </p:nvSpPr>
         <p:spPr>
           <a:xfrm>
-            <a:off x="4740148" y="2122931"/>
-            <a:ext cx="1583944" cy="457200"/>
+            <a:off x="5165818" y="2200655"/>
+            <a:ext cx="1474477" cy="457200"/>
           </a:xfrm>
           <a:prstGeom prst="rect">
             <a:avLst/>
@@ -15559,7 +15559,7 @@
         </p:spPr>
         <p:txBody>
           <a:bodyPr wrap="none" lIns="45720" rIns="45720" tIns="18288" bIns="18288" anchor="ctr">
-            <a:spAutoFit/>
+            <a:noAutofit/>
           </a:bodyPr>
           <a:lstStyle/>
           <a:p>
@@ -15578,7 +15578,7 @@
       </p:sp>
       <p:pic>
         <p:nvPicPr>
-          <p:cNvPr id="12" name="Picture 11" descr="0fd02e8179cc96ef.png"/>
+          <p:cNvPr id="12" name="Picture 11" descr="9ac445d070005962.png"/>
           <p:cNvPicPr>
             <a:picLocks noChangeAspect="1"/>
           </p:cNvPicPr>
@@ -15592,8 +15592,8 @@
         </p:blipFill>
         <p:spPr>
           <a:xfrm>
-            <a:off x="6186932" y="2215896"/>
-            <a:ext cx="774192" cy="271272"/>
+            <a:off x="6503136" y="2293620"/>
+            <a:ext cx="777240" cy="271272"/>
           </a:xfrm>
           <a:prstGeom prst="rect">
             <a:avLst/>
@@ -15608,8 +15608,8 @@
         </p:nvSpPr>
         <p:spPr>
           <a:xfrm>
-            <a:off x="6961124" y="2122931"/>
-            <a:ext cx="725424" cy="457200"/>
+            <a:off x="7280376" y="2200655"/>
+            <a:ext cx="502163" cy="457200"/>
           </a:xfrm>
           <a:prstGeom prst="rect">
             <a:avLst/>
@@ -15618,7 +15618,7 @@
         </p:spPr>
         <p:txBody>
           <a:bodyPr wrap="none" lIns="45720" rIns="45720" tIns="18288" bIns="18288" anchor="ctr">
-            <a:spAutoFit/>
+            <a:noAutofit/>
           </a:bodyPr>
           <a:lstStyle/>
           <a:p>
@@ -15637,7 +15637,7 @@
       </p:sp>
       <p:pic>
         <p:nvPicPr>
-          <p:cNvPr id="14" name="Picture 13" descr="90e8bcce6a738962.png"/>
+          <p:cNvPr id="14" name="Picture 13" descr="d05130d66ecf91cb.png"/>
           <p:cNvPicPr>
             <a:picLocks noChangeAspect="1"/>
           </p:cNvPicPr>
@@ -15651,8 +15651,8 @@
         </p:blipFill>
         <p:spPr>
           <a:xfrm>
-            <a:off x="7549388" y="2209800"/>
-            <a:ext cx="783336" cy="283464"/>
+            <a:off x="7645380" y="2287524"/>
+            <a:ext cx="786384" cy="283464"/>
           </a:xfrm>
           <a:prstGeom prst="rect">
             <a:avLst/>
@@ -15667,8 +15667,8 @@
         </p:nvSpPr>
         <p:spPr>
           <a:xfrm>
-            <a:off x="8332724" y="2122931"/>
-            <a:ext cx="725424" cy="457200"/>
+            <a:off x="8431764" y="2200655"/>
+            <a:ext cx="502163" cy="457200"/>
           </a:xfrm>
           <a:prstGeom prst="rect">
             <a:avLst/>
@@ -15677,7 +15677,7 @@
         </p:spPr>
         <p:txBody>
           <a:bodyPr wrap="none" lIns="45720" rIns="45720" tIns="18288" bIns="18288" anchor="ctr">
-            <a:spAutoFit/>
+            <a:noAutofit/>
           </a:bodyPr>
           <a:lstStyle/>
           <a:p>
@@ -15696,7 +15696,7 @@
       </p:sp>
       <p:pic>
         <p:nvPicPr>
-          <p:cNvPr id="16" name="Picture 15" descr="07fcb1bbd55c697d.png"/>
+          <p:cNvPr id="16" name="Picture 15" descr="23b44b96e089193a.png"/>
           <p:cNvPicPr>
             <a:picLocks noChangeAspect="1"/>
           </p:cNvPicPr>
@@ -15710,7 +15710,7 @@
         </p:blipFill>
         <p:spPr>
           <a:xfrm>
-            <a:off x="8920988" y="2209800"/>
+            <a:off x="8796768" y="2287524"/>
             <a:ext cx="743712" cy="283464"/>
           </a:xfrm>
           <a:prstGeom prst="rect">
@@ -15726,8 +15726,8 @@
         </p:nvSpPr>
         <p:spPr>
           <a:xfrm>
-            <a:off x="9664700" y="2122931"/>
-            <a:ext cx="382016" cy="457200"/>
+            <a:off x="9540480" y="2200655"/>
+            <a:ext cx="307595" cy="457200"/>
           </a:xfrm>
           <a:prstGeom prst="rect">
             <a:avLst/>
@@ -15736,7 +15736,7 @@
         </p:spPr>
         <p:txBody>
           <a:bodyPr wrap="none" lIns="45720" rIns="45720" tIns="18288" bIns="18288" anchor="ctr">
-            <a:spAutoFit/>
+            <a:noAutofit/>
           </a:bodyPr>
           <a:lstStyle/>
           <a:p>
@@ -15761,7 +15761,7 @@
         </p:nvSpPr>
         <p:spPr>
           <a:xfrm>
-            <a:off x="1828800" y="2919983"/>
+            <a:off x="1828800" y="3075431"/>
             <a:ext cx="8503920" cy="548640"/>
           </a:xfrm>
           <a:prstGeom prst="rect">
@@ -18050,7 +18050,7 @@
       </p:cxnSp>
       <p:pic>
         <p:nvPicPr>
-          <p:cNvPr id="11" name="Picture 10" descr="cd03183ea8e9c83d.png"/>
+          <p:cNvPr id="11" name="Picture 10" descr="0adc02d1493e5ae4.png"/>
           <p:cNvPicPr>
             <a:picLocks noChangeAspect="1"/>
           </p:cNvPicPr>
@@ -18064,8 +18064,8 @@
         </p:blipFill>
         <p:spPr>
           <a:xfrm>
-            <a:off x="2483104" y="2340864"/>
-            <a:ext cx="1493520" cy="512064"/>
+            <a:off x="2865665" y="2340864"/>
+            <a:ext cx="1557528" cy="673608"/>
           </a:xfrm>
           <a:prstGeom prst="rect">
             <a:avLst/>
@@ -18080,8 +18080,8 @@
         </p:nvSpPr>
         <p:spPr>
           <a:xfrm>
-            <a:off x="3976623" y="2368296"/>
-            <a:ext cx="1927352" cy="457200"/>
+            <a:off x="4423193" y="2449068"/>
+            <a:ext cx="1524855" cy="457200"/>
           </a:xfrm>
           <a:prstGeom prst="rect">
             <a:avLst/>
@@ -18090,7 +18090,7 @@
         </p:spPr>
         <p:txBody>
           <a:bodyPr wrap="none" lIns="45720" rIns="45720" tIns="18288" bIns="18288" anchor="ctr">
-            <a:spAutoFit/>
+            <a:noAutofit/>
           </a:bodyPr>
           <a:lstStyle/>
           <a:p>
@@ -18109,7 +18109,7 @@
       </p:sp>
       <p:pic>
         <p:nvPicPr>
-          <p:cNvPr id="13" name="Picture 12" descr="f45ae5d78124758b.png"/>
+          <p:cNvPr id="13" name="Picture 12" descr="c5ae5c8435316fdc.png"/>
           <p:cNvPicPr>
             <a:picLocks noChangeAspect="1"/>
           </p:cNvPicPr>
@@ -18123,7 +18123,7 @@
         </p:blipFill>
         <p:spPr>
           <a:xfrm>
-            <a:off x="5766816" y="2453640"/>
+            <a:off x="5810888" y="2534412"/>
             <a:ext cx="1082040" cy="286512"/>
           </a:xfrm>
           <a:prstGeom prst="rect">
@@ -18139,8 +18139,8 @@
         </p:nvSpPr>
         <p:spPr>
           <a:xfrm>
-            <a:off x="6848856" y="2368296"/>
-            <a:ext cx="1755648" cy="457200"/>
+            <a:off x="6892928" y="2449068"/>
+            <a:ext cx="1403434" cy="457200"/>
           </a:xfrm>
           <a:prstGeom prst="rect">
             <a:avLst/>
@@ -18149,7 +18149,7 @@
         </p:spPr>
         <p:txBody>
           <a:bodyPr wrap="none" lIns="45720" rIns="45720" tIns="18288" bIns="18288" anchor="ctr">
-            <a:spAutoFit/>
+            <a:noAutofit/>
           </a:bodyPr>
           <a:lstStyle/>
           <a:p>
@@ -18168,7 +18168,7 @@
       </p:sp>
       <p:pic>
         <p:nvPicPr>
-          <p:cNvPr id="15" name="Picture 14" descr="e8d56c740c9f471a.png"/>
+          <p:cNvPr id="15" name="Picture 14" descr="93a35f9de365ddad.png"/>
           <p:cNvPicPr>
             <a:picLocks noChangeAspect="1"/>
           </p:cNvPicPr>
@@ -18182,7 +18182,7 @@
         </p:blipFill>
         <p:spPr>
           <a:xfrm>
-            <a:off x="8467344" y="2455164"/>
+            <a:off x="8159202" y="2535936"/>
             <a:ext cx="966216" cy="283464"/>
           </a:xfrm>
           <a:prstGeom prst="rect">
@@ -18198,8 +18198,8 @@
         </p:nvSpPr>
         <p:spPr>
           <a:xfrm>
-            <a:off x="9433560" y="2368296"/>
-            <a:ext cx="382016" cy="457200"/>
+            <a:off x="9125418" y="2449068"/>
+            <a:ext cx="307595" cy="457200"/>
           </a:xfrm>
           <a:prstGeom prst="rect">
             <a:avLst/>
@@ -18208,7 +18208,7 @@
         </p:spPr>
         <p:txBody>
           <a:bodyPr wrap="none" lIns="45720" rIns="45720" tIns="18288" bIns="18288" anchor="ctr">
-            <a:spAutoFit/>
+            <a:noAutofit/>
           </a:bodyPr>
           <a:lstStyle/>
           <a:p>
@@ -18227,7 +18227,7 @@
       </p:sp>
       <p:pic>
         <p:nvPicPr>
-          <p:cNvPr id="17" name="Picture 16" descr="8c021bf12a31ca28.png"/>
+          <p:cNvPr id="17" name="Picture 16" descr="d74aec1c3ec8a811.png"/>
           <p:cNvPicPr>
             <a:picLocks noChangeAspect="1"/>
           </p:cNvPicPr>
@@ -18241,8 +18241,8 @@
         </p:blipFill>
         <p:spPr>
           <a:xfrm>
-            <a:off x="2689860" y="3127248"/>
-            <a:ext cx="5163312" cy="512064"/>
+            <a:off x="2785734" y="3288792"/>
+            <a:ext cx="5285232" cy="673608"/>
           </a:xfrm>
           <a:prstGeom prst="rect">
             <a:avLst/>
@@ -18257,8 +18257,8 @@
         </p:nvSpPr>
         <p:spPr>
           <a:xfrm>
-            <a:off x="7853172" y="3154680"/>
-            <a:ext cx="1755648" cy="457200"/>
+            <a:off x="8070966" y="3396996"/>
+            <a:ext cx="1441979" cy="457200"/>
           </a:xfrm>
           <a:prstGeom prst="rect">
             <a:avLst/>
@@ -18267,7 +18267,7 @@
         </p:spPr>
         <p:txBody>
           <a:bodyPr wrap="none" lIns="45720" rIns="45720" tIns="18288" bIns="18288" anchor="ctr">
-            <a:spAutoFit/>
+            <a:noAutofit/>
           </a:bodyPr>
           <a:lstStyle/>
           <a:p>
@@ -18292,8 +18292,8 @@
         </p:nvSpPr>
         <p:spPr>
           <a:xfrm>
-            <a:off x="1204975" y="3890772"/>
-            <a:ext cx="1412240" cy="457200"/>
+            <a:off x="1760315" y="4213859"/>
+            <a:ext cx="1233003" cy="457200"/>
           </a:xfrm>
           <a:prstGeom prst="rect">
             <a:avLst/>
@@ -18302,7 +18302,7 @@
         </p:spPr>
         <p:txBody>
           <a:bodyPr wrap="none" lIns="45720" rIns="45720" tIns="18288" bIns="18288" anchor="ctr">
-            <a:spAutoFit/>
+            <a:noAutofit/>
           </a:bodyPr>
           <a:lstStyle/>
           <a:p>
@@ -18321,7 +18321,7 @@
       </p:sp>
       <p:pic>
         <p:nvPicPr>
-          <p:cNvPr id="20" name="Picture 19" descr="54dbe1d08b69c31c.png"/>
+          <p:cNvPr id="20" name="Picture 19" descr="470a2cb670592e03.png"/>
           <p:cNvPicPr>
             <a:picLocks noChangeAspect="1"/>
           </p:cNvPicPr>
@@ -18335,7 +18335,7 @@
         </p:blipFill>
         <p:spPr>
           <a:xfrm>
-            <a:off x="2480055" y="3979164"/>
+            <a:off x="2856159" y="4302251"/>
             <a:ext cx="1063752" cy="280416"/>
           </a:xfrm>
           <a:prstGeom prst="rect">
@@ -18351,8 +18351,8 @@
         </p:nvSpPr>
         <p:spPr>
           <a:xfrm>
-            <a:off x="3543807" y="3890772"/>
-            <a:ext cx="1068832" cy="457200"/>
+            <a:off x="3919911" y="4213859"/>
+            <a:ext cx="696731" cy="457200"/>
           </a:xfrm>
           <a:prstGeom prst="rect">
             <a:avLst/>
@@ -18361,7 +18361,7 @@
         </p:spPr>
         <p:txBody>
           <a:bodyPr wrap="none" lIns="45720" rIns="45720" tIns="18288" bIns="18288" anchor="ctr">
-            <a:spAutoFit/>
+            <a:noAutofit/>
           </a:bodyPr>
           <a:lstStyle/>
           <a:p>
@@ -18380,7 +18380,7 @@
       </p:sp>
       <p:pic>
         <p:nvPicPr>
-          <p:cNvPr id="22" name="Picture 21" descr="c0359e68073c5e0f.png"/>
+          <p:cNvPr id="22" name="Picture 21" descr="8b91d3b79ed4a5fa.png"/>
           <p:cNvPicPr>
             <a:picLocks noChangeAspect="1"/>
           </p:cNvPicPr>
@@ -18394,8 +18394,8 @@
         </p:blipFill>
         <p:spPr>
           <a:xfrm>
-            <a:off x="4475479" y="3915156"/>
-            <a:ext cx="2484120" cy="408432"/>
+            <a:off x="4479482" y="4239767"/>
+            <a:ext cx="2484120" cy="405384"/>
           </a:xfrm>
           <a:prstGeom prst="rect">
             <a:avLst/>
@@ -18410,8 +18410,8 @@
         </p:nvSpPr>
         <p:spPr>
           <a:xfrm>
-            <a:off x="6959600" y="3890772"/>
-            <a:ext cx="2442464" cy="457200"/>
+            <a:off x="6963602" y="4213859"/>
+            <a:ext cx="1880073" cy="457200"/>
           </a:xfrm>
           <a:prstGeom prst="rect">
             <a:avLst/>
@@ -18420,7 +18420,7 @@
         </p:spPr>
         <p:txBody>
           <a:bodyPr wrap="none" lIns="45720" rIns="45720" tIns="18288" bIns="18288" anchor="ctr">
-            <a:spAutoFit/>
+            <a:noAutofit/>
           </a:bodyPr>
           <a:lstStyle/>
           <a:p>
@@ -18439,7 +18439,7 @@
       </p:sp>
       <p:pic>
         <p:nvPicPr>
-          <p:cNvPr id="24" name="Picture 23" descr="8c26aca529f2a81c.png"/>
+          <p:cNvPr id="24" name="Picture 23" descr="e047b6631084f988.png"/>
           <p:cNvPicPr>
             <a:picLocks noChangeAspect="1"/>
           </p:cNvPicPr>
@@ -18453,8 +18453,8 @@
         </p:blipFill>
         <p:spPr>
           <a:xfrm>
-            <a:off x="9264904" y="3948684"/>
-            <a:ext cx="1691640" cy="341376"/>
+            <a:off x="8706516" y="4271771"/>
+            <a:ext cx="1694688" cy="341376"/>
           </a:xfrm>
           <a:prstGeom prst="rect">
             <a:avLst/>
@@ -18469,7 +18469,7 @@
         </p:nvSpPr>
         <p:spPr>
           <a:xfrm>
-            <a:off x="987552" y="4663440"/>
+            <a:off x="987552" y="4986528"/>
             <a:ext cx="10131551" cy="950976"/>
           </a:xfrm>
           <a:prstGeom prst="rect">
@@ -18837,8 +18837,8 @@
         </p:nvSpPr>
         <p:spPr>
           <a:xfrm>
-            <a:off x="1751583" y="2318004"/>
-            <a:ext cx="8795512" cy="457200"/>
+            <a:off x="2219924" y="2318004"/>
+            <a:ext cx="7858831" cy="457200"/>
           </a:xfrm>
           <a:prstGeom prst="rect">
             <a:avLst/>
@@ -18847,7 +18847,7 @@
         </p:spPr>
         <p:txBody>
           <a:bodyPr wrap="none" lIns="45720" rIns="45720" tIns="18288" bIns="18288" anchor="ctr">
-            <a:spAutoFit/>
+            <a:noAutofit/>
           </a:bodyPr>
           <a:lstStyle/>
           <a:p>
@@ -18866,7 +18866,7 @@
       </p:sp>
       <p:pic>
         <p:nvPicPr>
-          <p:cNvPr id="12" name="Picture 11" descr="dd671573aa710050.png"/>
+          <p:cNvPr id="12" name="Picture 11" descr="df4025967bb63d7c.png"/>
           <p:cNvPicPr>
             <a:picLocks noChangeAspect="1"/>
           </p:cNvPicPr>
@@ -18880,8 +18880,8 @@
         </p:blipFill>
         <p:spPr>
           <a:xfrm>
-            <a:off x="4968239" y="3055620"/>
-            <a:ext cx="2225040" cy="353568"/>
+            <a:off x="4969764" y="3057144"/>
+            <a:ext cx="2221992" cy="350520"/>
           </a:xfrm>
           <a:prstGeom prst="rect">
             <a:avLst/>
@@ -18896,8 +18896,8 @@
         </p:nvSpPr>
         <p:spPr>
           <a:xfrm>
-            <a:off x="1408175" y="3689604"/>
-            <a:ext cx="9482328" cy="457200"/>
+            <a:off x="2046180" y="3689604"/>
+            <a:ext cx="8206319" cy="457200"/>
           </a:xfrm>
           <a:prstGeom prst="rect">
             <a:avLst/>
@@ -18906,7 +18906,7 @@
         </p:spPr>
         <p:txBody>
           <a:bodyPr wrap="none" lIns="45720" rIns="45720" tIns="18288" bIns="18288" anchor="ctr">
-            <a:spAutoFit/>
+            <a:noAutofit/>
           </a:bodyPr>
           <a:lstStyle/>
           <a:p>
@@ -18925,7 +18925,7 @@
       </p:sp>
       <p:pic>
         <p:nvPicPr>
-          <p:cNvPr id="14" name="Picture 13" descr="56530a101f600aba.png"/>
+          <p:cNvPr id="14" name="Picture 13" descr="d2efbf0da391d0ea.png"/>
           <p:cNvPicPr>
             <a:picLocks noChangeAspect="1"/>
           </p:cNvPicPr>
@@ -18939,8 +18939,8 @@
         </p:blipFill>
         <p:spPr>
           <a:xfrm>
-            <a:off x="4966716" y="4427220"/>
-            <a:ext cx="2228088" cy="353568"/>
+            <a:off x="4966716" y="4428744"/>
+            <a:ext cx="2228088" cy="350520"/>
           </a:xfrm>
           <a:prstGeom prst="rect">
             <a:avLst/>
@@ -19282,7 +19282,7 @@
       </p:cxnSp>
       <p:pic>
         <p:nvPicPr>
-          <p:cNvPr id="10" name="Picture 9" descr="85ff1df228809dec.png"/>
+          <p:cNvPr id="10" name="Picture 9" descr="919481ee0e1540e6.png"/>
           <p:cNvPicPr>
             <a:picLocks noChangeAspect="1"/>
           </p:cNvPicPr>
@@ -19296,8 +19296,8 @@
         </p:blipFill>
         <p:spPr>
           <a:xfrm>
-            <a:off x="3099307" y="2340864"/>
-            <a:ext cx="4687824" cy="502920"/>
+            <a:off x="3259339" y="2340864"/>
+            <a:ext cx="4690872" cy="502920"/>
           </a:xfrm>
           <a:prstGeom prst="rect">
             <a:avLst/>
@@ -19312,8 +19312,8 @@
         </p:nvSpPr>
         <p:spPr>
           <a:xfrm>
-            <a:off x="7787132" y="2363724"/>
-            <a:ext cx="1412240" cy="457200"/>
+            <a:off x="7950211" y="2363724"/>
+            <a:ext cx="1089128" cy="457200"/>
           </a:xfrm>
           <a:prstGeom prst="rect">
             <a:avLst/>
@@ -19322,7 +19322,7 @@
         </p:spPr>
         <p:txBody>
           <a:bodyPr wrap="none" lIns="45720" rIns="45720" tIns="18288" bIns="18288" anchor="ctr">
-            <a:spAutoFit/>
+            <a:noAutofit/>
           </a:bodyPr>
           <a:lstStyle/>
           <a:p>
@@ -19347,8 +19347,8 @@
         </p:nvSpPr>
         <p:spPr>
           <a:xfrm>
-            <a:off x="1742948" y="3095244"/>
-            <a:ext cx="5876544" cy="457200"/>
+            <a:off x="2297423" y="3095244"/>
+            <a:ext cx="5087657" cy="457200"/>
           </a:xfrm>
           <a:prstGeom prst="rect">
             <a:avLst/>
@@ -19357,7 +19357,7 @@
         </p:spPr>
         <p:txBody>
           <a:bodyPr wrap="none" lIns="45720" rIns="45720" tIns="18288" bIns="18288" anchor="ctr">
-            <a:spAutoFit/>
+            <a:noAutofit/>
           </a:bodyPr>
           <a:lstStyle/>
           <a:p>
@@ -19376,7 +19376,7 @@
       </p:sp>
       <p:pic>
         <p:nvPicPr>
-          <p:cNvPr id="13" name="Picture 12" descr="468291508904a004.png"/>
+          <p:cNvPr id="13" name="Picture 12" descr="e6ef06ed6a80f4a3.png"/>
           <p:cNvPicPr>
             <a:picLocks noChangeAspect="1"/>
           </p:cNvPicPr>
@@ -19390,8 +19390,8 @@
         </p:blipFill>
         <p:spPr>
           <a:xfrm>
-            <a:off x="7482332" y="3147060"/>
-            <a:ext cx="1661160" cy="353568"/>
+            <a:off x="7247920" y="3148584"/>
+            <a:ext cx="1664208" cy="350520"/>
           </a:xfrm>
           <a:prstGeom prst="rect">
             <a:avLst/>
@@ -19406,8 +19406,8 @@
         </p:nvSpPr>
         <p:spPr>
           <a:xfrm>
-            <a:off x="9143492" y="3095244"/>
-            <a:ext cx="1412240" cy="457200"/>
+            <a:off x="8912128" y="3095244"/>
+            <a:ext cx="1089128" cy="457200"/>
           </a:xfrm>
           <a:prstGeom prst="rect">
             <a:avLst/>
@@ -19416,7 +19416,7 @@
         </p:spPr>
         <p:txBody>
           <a:bodyPr wrap="none" lIns="45720" rIns="45720" tIns="18288" bIns="18288" anchor="ctr">
-            <a:spAutoFit/>
+            <a:noAutofit/>
           </a:bodyPr>
           <a:lstStyle/>
           <a:p>
@@ -19739,8 +19739,8 @@
         </p:nvSpPr>
         <p:spPr>
           <a:xfrm>
-            <a:off x="3543808" y="2130552"/>
-            <a:ext cx="3472688" cy="457200"/>
+            <a:off x="3721151" y="2211323"/>
+            <a:ext cx="3131460" cy="457200"/>
           </a:xfrm>
           <a:prstGeom prst="rect">
             <a:avLst/>
@@ -19749,7 +19749,7 @@
         </p:spPr>
         <p:txBody>
           <a:bodyPr wrap="none" lIns="45720" rIns="45720" tIns="18288" bIns="18288" anchor="ctr">
-            <a:spAutoFit/>
+            <a:noAutofit/>
           </a:bodyPr>
           <a:lstStyle/>
           <a:p>
@@ -19768,7 +19768,7 @@
       </p:sp>
       <p:pic>
         <p:nvPicPr>
-          <p:cNvPr id="10" name="Picture 9" descr="cd03183ea8e9c83d.png"/>
+          <p:cNvPr id="10" name="Picture 9" descr="69f338afbe20426e.png"/>
           <p:cNvPicPr>
             <a:picLocks noChangeAspect="1"/>
           </p:cNvPicPr>
@@ -19782,8 +19782,8 @@
         </p:blipFill>
         <p:spPr>
           <a:xfrm>
-            <a:off x="6879336" y="2103120"/>
-            <a:ext cx="1493520" cy="512064"/>
+            <a:off x="6715452" y="2103120"/>
+            <a:ext cx="1554480" cy="673608"/>
           </a:xfrm>
           <a:prstGeom prst="rect">
             <a:avLst/>
@@ -19798,8 +19798,8 @@
         </p:nvSpPr>
         <p:spPr>
           <a:xfrm>
-            <a:off x="8372856" y="2130552"/>
-            <a:ext cx="382016" cy="457200"/>
+            <a:off x="8269932" y="2211323"/>
+            <a:ext cx="307595" cy="457200"/>
           </a:xfrm>
           <a:prstGeom prst="rect">
             <a:avLst/>
@@ -19808,7 +19808,7 @@
         </p:spPr>
         <p:txBody>
           <a:bodyPr wrap="none" lIns="45720" rIns="45720" tIns="18288" bIns="18288" anchor="ctr">
-            <a:spAutoFit/>
+            <a:noAutofit/>
           </a:bodyPr>
           <a:lstStyle/>
           <a:p>
@@ -19833,8 +19833,8 @@
         </p:nvSpPr>
         <p:spPr>
           <a:xfrm>
-            <a:off x="1023619" y="2912364"/>
-            <a:ext cx="1755648" cy="457200"/>
+            <a:off x="1269706" y="3073908"/>
+            <a:ext cx="1674725" cy="457200"/>
           </a:xfrm>
           <a:prstGeom prst="rect">
             <a:avLst/>
@@ -19843,7 +19843,7 @@
         </p:spPr>
         <p:txBody>
           <a:bodyPr wrap="none" lIns="45720" rIns="45720" tIns="18288" bIns="18288" anchor="ctr">
-            <a:spAutoFit/>
+            <a:noAutofit/>
           </a:bodyPr>
           <a:lstStyle/>
           <a:p>
@@ -19876,7 +19876,7 @@
         </p:blipFill>
         <p:spPr>
           <a:xfrm>
-            <a:off x="2642107" y="3049524"/>
+            <a:off x="2807271" y="3211068"/>
             <a:ext cx="283464" cy="182880"/>
           </a:xfrm>
           <a:prstGeom prst="rect">
@@ -19892,8 +19892,8 @@
         </p:nvSpPr>
         <p:spPr>
           <a:xfrm>
-            <a:off x="2925571" y="2912364"/>
-            <a:ext cx="4331208" cy="457200"/>
+            <a:off x="3090735" y="3073908"/>
+            <a:ext cx="4165510" cy="457200"/>
           </a:xfrm>
           <a:prstGeom prst="rect">
             <a:avLst/>
@@ -19902,7 +19902,7 @@
         </p:spPr>
         <p:txBody>
           <a:bodyPr wrap="none" lIns="45720" rIns="45720" tIns="18288" bIns="18288" anchor="ctr">
-            <a:spAutoFit/>
+            <a:noAutofit/>
           </a:bodyPr>
           <a:lstStyle/>
           <a:p>
@@ -19935,7 +19935,7 @@
         </p:blipFill>
         <p:spPr>
           <a:xfrm>
-            <a:off x="7119620" y="3046476"/>
+            <a:off x="7119086" y="3208020"/>
             <a:ext cx="167640" cy="188976"/>
           </a:xfrm>
           <a:prstGeom prst="rect">
@@ -19951,8 +19951,8 @@
         </p:nvSpPr>
         <p:spPr>
           <a:xfrm>
-            <a:off x="7287260" y="2912364"/>
-            <a:ext cx="3987800" cy="457200"/>
+            <a:off x="7286726" y="3073908"/>
+            <a:ext cx="3742246" cy="457200"/>
           </a:xfrm>
           <a:prstGeom prst="rect">
             <a:avLst/>
@@ -19961,7 +19961,7 @@
         </p:spPr>
         <p:txBody>
           <a:bodyPr wrap="none" lIns="45720" rIns="45720" tIns="18288" bIns="18288" anchor="ctr">
-            <a:spAutoFit/>
+            <a:noAutofit/>
           </a:bodyPr>
           <a:lstStyle/>
           <a:p>
@@ -19986,8 +19986,8 @@
         </p:nvSpPr>
         <p:spPr>
           <a:xfrm>
-            <a:off x="1223772" y="3643884"/>
-            <a:ext cx="1068832" cy="457200"/>
+            <a:off x="1659688" y="3805427"/>
+            <a:ext cx="1066148" cy="457200"/>
           </a:xfrm>
           <a:prstGeom prst="rect">
             <a:avLst/>
@@ -19996,7 +19996,7 @@
         </p:spPr>
         <p:txBody>
           <a:bodyPr wrap="none" lIns="45720" rIns="45720" tIns="18288" bIns="18288" anchor="ctr">
-            <a:spAutoFit/>
+            <a:noAutofit/>
           </a:bodyPr>
           <a:lstStyle/>
           <a:p>
@@ -20029,7 +20029,7 @@
         </p:blipFill>
         <p:spPr>
           <a:xfrm>
-            <a:off x="2155444" y="3738371"/>
+            <a:off x="2588676" y="3899915"/>
             <a:ext cx="295656" cy="268224"/>
           </a:xfrm>
           <a:prstGeom prst="rect">
@@ -20045,8 +20045,8 @@
         </p:nvSpPr>
         <p:spPr>
           <a:xfrm>
-            <a:off x="2451100" y="3643884"/>
-            <a:ext cx="8623808" cy="457200"/>
+            <a:off x="2884332" y="3805427"/>
+            <a:ext cx="7754658" cy="457200"/>
           </a:xfrm>
           <a:prstGeom prst="rect">
             <a:avLst/>
@@ -20055,7 +20055,7 @@
         </p:spPr>
         <p:txBody>
           <a:bodyPr wrap="none" lIns="45720" rIns="45720" tIns="18288" bIns="18288" anchor="ctr">
-            <a:spAutoFit/>
+            <a:noAutofit/>
           </a:bodyPr>
           <a:lstStyle/>
           <a:p>
@@ -20080,7 +20080,7 @@
         </p:nvSpPr>
         <p:spPr>
           <a:xfrm>
-            <a:off x="777240" y="4581144"/>
+            <a:off x="777240" y="4742688"/>
             <a:ext cx="10607040" cy="429370"/>
           </a:xfrm>
           <a:prstGeom prst="rect">
@@ -20372,7 +20372,7 @@
       </p:sp>
       <p:pic>
         <p:nvPicPr>
-          <p:cNvPr id="9" name="Picture 8" descr="da33bd67212b6850.png"/>
+          <p:cNvPr id="9" name="Picture 8" descr="d75f9c90e035e1e1.png"/>
           <p:cNvPicPr>
             <a:picLocks noChangeAspect="1"/>
           </p:cNvPicPr>
@@ -20387,7 +20387,7 @@
         <p:spPr>
           <a:xfrm>
             <a:off x="1828800" y="1920240"/>
-            <a:ext cx="2865120" cy="512064"/>
+            <a:ext cx="2926080" cy="673608"/>
           </a:xfrm>
           <a:prstGeom prst="rect">
             <a:avLst/>
@@ -20402,8 +20402,8 @@
         </p:nvSpPr>
         <p:spPr>
           <a:xfrm>
-            <a:off x="5151120" y="1947672"/>
-            <a:ext cx="6233160" cy="502920"/>
+            <a:off x="5212080" y="2028444"/>
+            <a:ext cx="6172199" cy="502920"/>
           </a:xfrm>
           <a:prstGeom prst="rect">
             <a:avLst/>
@@ -20431,7 +20431,7 @@
       </p:sp>
       <p:pic>
         <p:nvPicPr>
-          <p:cNvPr id="11" name="Picture 10" descr="6c7812b18e1d1e78.png"/>
+          <p:cNvPr id="11" name="Picture 10" descr="97f8b90e9d71c570.png"/>
           <p:cNvPicPr>
             <a:picLocks noChangeAspect="1"/>
           </p:cNvPicPr>
@@ -20445,8 +20445,8 @@
         </p:blipFill>
         <p:spPr>
           <a:xfrm>
-            <a:off x="1828800" y="2706624"/>
-            <a:ext cx="2557272" cy="512064"/>
+            <a:off x="1828800" y="2868168"/>
+            <a:ext cx="2618232" cy="673608"/>
           </a:xfrm>
           <a:prstGeom prst="rect">
             <a:avLst/>
@@ -20461,7 +20461,7 @@
         </p:nvSpPr>
         <p:spPr>
           <a:xfrm>
-            <a:off x="4843272" y="2734056"/>
+            <a:off x="4904232" y="2976372"/>
             <a:ext cx="6400800" cy="502920"/>
           </a:xfrm>
           <a:prstGeom prst="rect">
@@ -20490,7 +20490,7 @@
       </p:sp>
       <p:pic>
         <p:nvPicPr>
-          <p:cNvPr id="13" name="Picture 12" descr="9f573810e1733676.png"/>
+          <p:cNvPr id="13" name="Picture 12" descr="a0f52d5d0e25fc41.png"/>
           <p:cNvPicPr>
             <a:picLocks noChangeAspect="1"/>
           </p:cNvPicPr>
@@ -20504,8 +20504,8 @@
         </p:blipFill>
         <p:spPr>
           <a:xfrm>
-            <a:off x="1828800" y="3493008"/>
-            <a:ext cx="3517392" cy="353568"/>
+            <a:off x="1828800" y="3816096"/>
+            <a:ext cx="3517392" cy="350520"/>
           </a:xfrm>
           <a:prstGeom prst="rect">
             <a:avLst/>
@@ -20520,7 +20520,7 @@
         </p:nvSpPr>
         <p:spPr>
           <a:xfrm>
-            <a:off x="5803392" y="3441192"/>
+            <a:off x="5803392" y="3762756"/>
             <a:ext cx="5580887" cy="502920"/>
           </a:xfrm>
           <a:prstGeom prst="rect">
@@ -20555,7 +20555,7 @@
         </p:nvSpPr>
         <p:spPr>
           <a:xfrm>
-            <a:off x="777240" y="4572000"/>
+            <a:off x="777240" y="4623816"/>
             <a:ext cx="10607040" cy="548640"/>
           </a:xfrm>
           <a:prstGeom prst="rect">
@@ -20853,8 +20853,8 @@
         </p:nvSpPr>
         <p:spPr>
           <a:xfrm>
-            <a:off x="1192783" y="2287524"/>
-            <a:ext cx="1068832" cy="457200"/>
+            <a:off x="1538372" y="2391156"/>
+            <a:ext cx="1066148" cy="457200"/>
           </a:xfrm>
           <a:prstGeom prst="rect">
             <a:avLst/>
@@ -20863,7 +20863,7 @@
         </p:spPr>
         <p:txBody>
           <a:bodyPr wrap="none" lIns="45720" rIns="45720" tIns="18288" bIns="18288" anchor="ctr">
-            <a:spAutoFit/>
+            <a:noAutofit/>
           </a:bodyPr>
           <a:lstStyle/>
           <a:p>
@@ -20882,7 +20882,7 @@
       </p:sp>
       <p:pic>
         <p:nvPicPr>
-          <p:cNvPr id="10" name="Picture 9" descr="e2b8bd68bb7d8e99.png"/>
+          <p:cNvPr id="10" name="Picture 9" descr="87c9946de92fdd9d.png"/>
           <p:cNvPicPr>
             <a:picLocks noChangeAspect="1"/>
           </p:cNvPicPr>
@@ -20896,8 +20896,8 @@
         </p:blipFill>
         <p:spPr>
           <a:xfrm>
-            <a:off x="2124455" y="2194560"/>
-            <a:ext cx="1865376" cy="643128"/>
+            <a:off x="2467360" y="2194560"/>
+            <a:ext cx="1941576" cy="850392"/>
           </a:xfrm>
           <a:prstGeom prst="rect">
             <a:avLst/>
@@ -20912,8 +20912,8 @@
         </p:nvSpPr>
         <p:spPr>
           <a:xfrm>
-            <a:off x="3989831" y="2287524"/>
-            <a:ext cx="1240536" cy="457200"/>
+            <a:off x="4408936" y="2391156"/>
+            <a:ext cx="942097" cy="457200"/>
           </a:xfrm>
           <a:prstGeom prst="rect">
             <a:avLst/>
@@ -20922,7 +20922,7 @@
         </p:spPr>
         <p:txBody>
           <a:bodyPr wrap="none" lIns="45720" rIns="45720" tIns="18288" bIns="18288" anchor="ctr">
-            <a:spAutoFit/>
+            <a:noAutofit/>
           </a:bodyPr>
           <a:lstStyle/>
           <a:p>
@@ -20955,7 +20955,7 @@
         </p:blipFill>
         <p:spPr>
           <a:xfrm>
-            <a:off x="5093207" y="2336291"/>
+            <a:off x="5213874" y="2439924"/>
             <a:ext cx="1606296" cy="359664"/>
           </a:xfrm>
           <a:prstGeom prst="rect">
@@ -20971,8 +20971,8 @@
         </p:nvSpPr>
         <p:spPr>
           <a:xfrm>
-            <a:off x="6699504" y="2287524"/>
-            <a:ext cx="2099056" cy="457200"/>
+            <a:off x="6820170" y="2391156"/>
+            <a:ext cx="1800668" cy="457200"/>
           </a:xfrm>
           <a:prstGeom prst="rect">
             <a:avLst/>
@@ -20981,7 +20981,7 @@
         </p:spPr>
         <p:txBody>
           <a:bodyPr wrap="none" lIns="45720" rIns="45720" tIns="18288" bIns="18288" anchor="ctr">
-            <a:spAutoFit/>
+            <a:noAutofit/>
           </a:bodyPr>
           <a:lstStyle/>
           <a:p>
@@ -21014,7 +21014,7 @@
         </p:blipFill>
         <p:spPr>
           <a:xfrm>
-            <a:off x="8661400" y="2337816"/>
+            <a:off x="8483678" y="2441448"/>
             <a:ext cx="1203960" cy="356616"/>
           </a:xfrm>
           <a:prstGeom prst="rect">
@@ -21030,8 +21030,8 @@
         </p:nvSpPr>
         <p:spPr>
           <a:xfrm>
-            <a:off x="9865359" y="2287524"/>
-            <a:ext cx="1240536" cy="457200"/>
+            <a:off x="9687638" y="2391156"/>
+            <a:ext cx="1072668" cy="457200"/>
           </a:xfrm>
           <a:prstGeom prst="rect">
             <a:avLst/>
@@ -21040,7 +21040,7 @@
         </p:spPr>
         <p:txBody>
           <a:bodyPr wrap="none" lIns="45720" rIns="45720" tIns="18288" bIns="18288" anchor="ctr">
-            <a:spAutoFit/>
+            <a:noAutofit/>
           </a:bodyPr>
           <a:lstStyle/>
           <a:p>

--- a/a7/build/out/u4/A7 4.07  Slides.pptx
+++ b/a7/build/out/u4/A7 4.07  Slides.pptx
@@ -6998,8 +6998,8 @@
         </p:nvSpPr>
         <p:spPr>
           <a:xfrm>
-            <a:off x="2131804" y="2171700"/>
-            <a:ext cx="3076140" cy="457200"/>
+            <a:off x="1234440" y="1851660"/>
+            <a:ext cx="2855752" cy="457200"/>
           </a:xfrm>
           <a:prstGeom prst="rect">
             <a:avLst/>
@@ -7014,7 +7014,7 @@
           <a:p>
             <a:pPr algn="l"/>
             <a:r>
-              <a:rPr sz="2600" b="0" i="0">
+              <a:rPr sz="2400" b="0" i="0">
                 <a:solidFill>
                   <a:srgbClr val="1A1A1A"/>
                 </a:solidFill>
@@ -7027,7 +7027,7 @@
       </p:sp>
       <p:pic>
         <p:nvPicPr>
-          <p:cNvPr id="10" name="Picture 9" descr="cf577f11d8a35f67.png"/>
+          <p:cNvPr id="10" name="Picture 9" descr="e1d72257cbc0a034.png"/>
           <p:cNvPicPr>
             <a:picLocks noChangeAspect="1"/>
           </p:cNvPicPr>
@@ -7041,8 +7041,8 @@
         </p:blipFill>
         <p:spPr>
           <a:xfrm>
-            <a:off x="5070784" y="2260092"/>
-            <a:ext cx="1082040" cy="280416"/>
+            <a:off x="3953032" y="1964435"/>
+            <a:ext cx="877824" cy="231648"/>
           </a:xfrm>
           <a:prstGeom prst="rect">
             <a:avLst/>
@@ -7057,8 +7057,8 @@
         </p:nvSpPr>
         <p:spPr>
           <a:xfrm>
-            <a:off x="6152824" y="2171700"/>
-            <a:ext cx="2325686" cy="457200"/>
+            <a:off x="4830856" y="1851660"/>
+            <a:ext cx="2163038" cy="457200"/>
           </a:xfrm>
           <a:prstGeom prst="rect">
             <a:avLst/>
@@ -7073,7 +7073,7 @@
           <a:p>
             <a:pPr algn="l"/>
             <a:r>
-              <a:rPr sz="2600" b="0" i="0">
+              <a:rPr sz="2400" b="0" i="0">
                 <a:solidFill>
                   <a:srgbClr val="1A1A1A"/>
                 </a:solidFill>
@@ -7086,7 +7086,7 @@
       </p:sp>
       <p:pic>
         <p:nvPicPr>
-          <p:cNvPr id="12" name="Picture 11" descr="e9f90958d544e03f.png"/>
+          <p:cNvPr id="12" name="Picture 11" descr="aa5cd635672dcdba.png"/>
           <p:cNvPicPr>
             <a:picLocks noChangeAspect="1"/>
           </p:cNvPicPr>
@@ -7100,8 +7100,8 @@
         </p:blipFill>
         <p:spPr>
           <a:xfrm>
-            <a:off x="8341351" y="2258568"/>
-            <a:ext cx="752856" cy="283464"/>
+            <a:off x="6856734" y="1965960"/>
+            <a:ext cx="609600" cy="228600"/>
           </a:xfrm>
           <a:prstGeom prst="rect">
             <a:avLst/>
@@ -7116,8 +7116,8 @@
         </p:nvSpPr>
         <p:spPr>
           <a:xfrm>
-            <a:off x="9094207" y="2171700"/>
-            <a:ext cx="1072668" cy="457200"/>
+            <a:off x="7466334" y="1851660"/>
+            <a:ext cx="1006410" cy="457200"/>
           </a:xfrm>
           <a:prstGeom prst="rect">
             <a:avLst/>
@@ -7132,7 +7132,7 @@
           <a:p>
             <a:pPr algn="l"/>
             <a:r>
-              <a:rPr sz="2600" b="0" i="0">
+              <a:rPr sz="2400" b="0" i="0">
                 <a:solidFill>
                   <a:srgbClr val="1A1A1A"/>
                 </a:solidFill>
@@ -7151,23 +7151,23 @@
         </p:nvSpPr>
         <p:spPr>
           <a:xfrm>
-            <a:off x="777240" y="2880360"/>
-            <a:ext cx="10607040" cy="465151"/>
-          </a:xfrm>
-          <a:prstGeom prst="rect">
-            <a:avLst/>
-          </a:prstGeom>
-          <a:noFill/>
-        </p:spPr>
-        <p:txBody>
-          <a:bodyPr wrap="square" lIns="45720" rIns="45720" tIns="18288" bIns="18288" anchor="t">
-            <a:spAutoFit/>
-          </a:bodyPr>
-          <a:lstStyle/>
-          <a:p>
-            <a:pPr algn="ctr"/>
-            <a:r>
-              <a:rPr sz="2600" b="0" i="0">
+            <a:off x="1234440" y="2487168"/>
+            <a:ext cx="10058400" cy="429370"/>
+          </a:xfrm>
+          <a:prstGeom prst="rect">
+            <a:avLst/>
+          </a:prstGeom>
+          <a:noFill/>
+        </p:spPr>
+        <p:txBody>
+          <a:bodyPr wrap="square" lIns="45720" rIns="45720" tIns="18288" bIns="18288" anchor="t">
+            <a:spAutoFit/>
+          </a:bodyPr>
+          <a:lstStyle/>
+          <a:p>
+            <a:pPr algn="l"/>
+            <a:r>
+              <a:rPr sz="2400" b="0" i="0">
                 <a:solidFill>
                   <a:srgbClr val="1A1A1A"/>
                 </a:solidFill>
@@ -7186,8 +7186,8 @@
         </p:nvSpPr>
         <p:spPr>
           <a:xfrm>
-            <a:off x="3154117" y="3563443"/>
-            <a:ext cx="4265529" cy="457200"/>
+            <a:off x="1234440" y="3071986"/>
+            <a:ext cx="4437011" cy="457200"/>
           </a:xfrm>
           <a:prstGeom prst="rect">
             <a:avLst/>
@@ -7202,7 +7202,7 @@
           <a:p>
             <a:pPr algn="l"/>
             <a:r>
-              <a:rPr sz="2600" b="0" i="0">
+              <a:rPr sz="2400" b="1" i="0">
                 <a:solidFill>
                   <a:srgbClr val="1A1A1A"/>
                 </a:solidFill>
@@ -7215,7 +7215,7 @@
       </p:sp>
       <p:pic>
         <p:nvPicPr>
-          <p:cNvPr id="16" name="Picture 15" descr="69f338afbe20426e.png"/>
+          <p:cNvPr id="16" name="Picture 15" descr="8419d3078da3665a.png"/>
           <p:cNvPicPr>
             <a:picLocks noChangeAspect="1"/>
           </p:cNvPicPr>
@@ -7229,8 +7229,8 @@
         </p:blipFill>
         <p:spPr>
           <a:xfrm>
-            <a:off x="7282486" y="3455239"/>
-            <a:ext cx="1554480" cy="673608"/>
+            <a:off x="5534291" y="3026266"/>
+            <a:ext cx="1261872" cy="548640"/>
           </a:xfrm>
           <a:prstGeom prst="rect">
             <a:avLst/>
@@ -7245,8 +7245,8 @@
         </p:nvSpPr>
         <p:spPr>
           <a:xfrm>
-            <a:off x="8836966" y="3563443"/>
-            <a:ext cx="307595" cy="457200"/>
+            <a:off x="6796163" y="3071986"/>
+            <a:ext cx="300128" cy="457200"/>
           </a:xfrm>
           <a:prstGeom prst="rect">
             <a:avLst/>
@@ -7261,7 +7261,7 @@
           <a:p>
             <a:pPr algn="l"/>
             <a:r>
-              <a:rPr sz="2600" b="0" i="0">
+              <a:rPr sz="2400" b="1" i="0">
                 <a:solidFill>
                   <a:srgbClr val="1A1A1A"/>
                 </a:solidFill>
@@ -7280,7 +7280,7 @@
         </p:nvSpPr>
         <p:spPr>
           <a:xfrm>
-            <a:off x="777240" y="4540327"/>
+            <a:off x="777240" y="4343400"/>
             <a:ext cx="10607040" cy="457200"/>
           </a:xfrm>
           <a:prstGeom prst="rect">
@@ -7303,41 +7303,6 @@
                 <a:latin typeface="Century Schoolbook"/>
               </a:rPr>
               <a:t>Answer it.</a:t>
-            </a:r>
-          </a:p>
-        </p:txBody>
-      </p:sp>
-      <p:sp>
-        <p:nvSpPr>
-          <p:cNvPr id="19" name="TextBox 18"/>
-          <p:cNvSpPr txBox="1"/>
-          <p:nvPr/>
-        </p:nvSpPr>
-        <p:spPr>
-          <a:xfrm>
-            <a:off x="777240" y="5024959"/>
-            <a:ext cx="10607040" cy="365760"/>
-          </a:xfrm>
-          <a:prstGeom prst="rect">
-            <a:avLst/>
-          </a:prstGeom>
-          <a:noFill/>
-        </p:spPr>
-        <p:txBody>
-          <a:bodyPr wrap="square" lIns="45720" rIns="45720" tIns="18288" bIns="18288" anchor="t">
-            <a:spAutoFit/>
-          </a:bodyPr>
-          <a:lstStyle/>
-          <a:p>
-            <a:pPr algn="ctr"/>
-            <a:r>
-              <a:rPr sz="1900" b="0" i="1">
-                <a:solidFill>
-                  <a:srgbClr val="6B6B6B"/>
-                </a:solidFill>
-                <a:latin typeface="Century Schoolbook"/>
-              </a:rPr>
-              <a:t>Substitute in parentheses.</a:t>
             </a:r>
           </a:p>
         </p:txBody>
@@ -7613,8 +7578,8 @@
         </p:nvSpPr>
         <p:spPr>
           <a:xfrm>
-            <a:off x="2131804" y="2080260"/>
-            <a:ext cx="3076140" cy="457200"/>
+            <a:off x="1234440" y="1851660"/>
+            <a:ext cx="2855752" cy="457200"/>
           </a:xfrm>
           <a:prstGeom prst="rect">
             <a:avLst/>
@@ -7629,7 +7594,7 @@
           <a:p>
             <a:pPr algn="l"/>
             <a:r>
-              <a:rPr sz="2600" b="0" i="0">
+              <a:rPr sz="2400" b="0" i="0">
                 <a:solidFill>
                   <a:srgbClr val="1A1A1A"/>
                 </a:solidFill>
@@ -7642,7 +7607,7 @@
       </p:sp>
       <p:pic>
         <p:nvPicPr>
-          <p:cNvPr id="10" name="Picture 9" descr="cf577f11d8a35f67.png"/>
+          <p:cNvPr id="10" name="Picture 9" descr="996cd0b9dd16e722.png"/>
           <p:cNvPicPr>
             <a:picLocks noChangeAspect="1"/>
           </p:cNvPicPr>
@@ -7656,8 +7621,8 @@
         </p:blipFill>
         <p:spPr>
           <a:xfrm>
-            <a:off x="5070784" y="2168652"/>
-            <a:ext cx="1082040" cy="280416"/>
+            <a:off x="3953032" y="1964435"/>
+            <a:ext cx="883920" cy="231648"/>
           </a:xfrm>
           <a:prstGeom prst="rect">
             <a:avLst/>
@@ -7672,8 +7637,8 @@
         </p:nvSpPr>
         <p:spPr>
           <a:xfrm>
-            <a:off x="6152824" y="2080260"/>
-            <a:ext cx="2325686" cy="457200"/>
+            <a:off x="4836952" y="1851660"/>
+            <a:ext cx="2163038" cy="457200"/>
           </a:xfrm>
           <a:prstGeom prst="rect">
             <a:avLst/>
@@ -7688,7 +7653,7 @@
           <a:p>
             <a:pPr algn="l"/>
             <a:r>
-              <a:rPr sz="2600" b="0" i="0">
+              <a:rPr sz="2400" b="0" i="0">
                 <a:solidFill>
                   <a:srgbClr val="1A1A1A"/>
                 </a:solidFill>
@@ -7701,7 +7666,7 @@
       </p:sp>
       <p:pic>
         <p:nvPicPr>
-          <p:cNvPr id="12" name="Picture 11" descr="e9f90958d544e03f.png"/>
+          <p:cNvPr id="12" name="Picture 11" descr="f7f7478f3b1d3c67.png"/>
           <p:cNvPicPr>
             <a:picLocks noChangeAspect="1"/>
           </p:cNvPicPr>
@@ -7715,8 +7680,8 @@
         </p:blipFill>
         <p:spPr>
           <a:xfrm>
-            <a:off x="8341351" y="2167127"/>
-            <a:ext cx="752856" cy="283464"/>
+            <a:off x="6862830" y="1965960"/>
+            <a:ext cx="612648" cy="228600"/>
           </a:xfrm>
           <a:prstGeom prst="rect">
             <a:avLst/>
@@ -7731,8 +7696,8 @@
         </p:nvSpPr>
         <p:spPr>
           <a:xfrm>
-            <a:off x="9094207" y="2080260"/>
-            <a:ext cx="1072668" cy="457200"/>
+            <a:off x="7475478" y="1851660"/>
+            <a:ext cx="1006410" cy="457200"/>
           </a:xfrm>
           <a:prstGeom prst="rect">
             <a:avLst/>
@@ -7747,7 +7712,7 @@
           <a:p>
             <a:pPr algn="l"/>
             <a:r>
-              <a:rPr sz="2600" b="0" i="0">
+              <a:rPr sz="2400" b="0" i="0">
                 <a:solidFill>
                   <a:srgbClr val="1A1A1A"/>
                 </a:solidFill>
@@ -7766,23 +7731,23 @@
         </p:nvSpPr>
         <p:spPr>
           <a:xfrm>
-            <a:off x="777240" y="2788920"/>
-            <a:ext cx="10607040" cy="465151"/>
-          </a:xfrm>
-          <a:prstGeom prst="rect">
-            <a:avLst/>
-          </a:prstGeom>
-          <a:noFill/>
-        </p:spPr>
-        <p:txBody>
-          <a:bodyPr wrap="square" lIns="45720" rIns="45720" tIns="18288" bIns="18288" anchor="t">
-            <a:spAutoFit/>
-          </a:bodyPr>
-          <a:lstStyle/>
-          <a:p>
-            <a:pPr algn="ctr"/>
-            <a:r>
-              <a:rPr sz="2600" b="0" i="0">
+            <a:off x="1234440" y="2487168"/>
+            <a:ext cx="10058400" cy="429370"/>
+          </a:xfrm>
+          <a:prstGeom prst="rect">
+            <a:avLst/>
+          </a:prstGeom>
+          <a:noFill/>
+        </p:spPr>
+        <p:txBody>
+          <a:bodyPr wrap="square" lIns="45720" rIns="45720" tIns="18288" bIns="18288" anchor="t">
+            <a:spAutoFit/>
+          </a:bodyPr>
+          <a:lstStyle/>
+          <a:p>
+            <a:pPr algn="l"/>
+            <a:r>
+              <a:rPr sz="2400" b="0" i="0">
                 <a:solidFill>
                   <a:srgbClr val="1A1A1A"/>
                 </a:solidFill>
@@ -7801,8 +7766,8 @@
         </p:nvSpPr>
         <p:spPr>
           <a:xfrm>
-            <a:off x="3152593" y="3472003"/>
-            <a:ext cx="4265529" cy="457200"/>
+            <a:off x="1234440" y="3073510"/>
+            <a:ext cx="4437011" cy="457200"/>
           </a:xfrm>
           <a:prstGeom prst="rect">
             <a:avLst/>
@@ -7817,7 +7782,7 @@
           <a:p>
             <a:pPr algn="l"/>
             <a:r>
-              <a:rPr sz="2600" b="0" i="0">
+              <a:rPr sz="2400" b="1" i="0">
                 <a:solidFill>
                   <a:srgbClr val="1A1A1A"/>
                 </a:solidFill>
@@ -7830,7 +7795,7 @@
       </p:sp>
       <p:pic>
         <p:nvPicPr>
-          <p:cNvPr id="16" name="Picture 15" descr="0adc02d1493e5ae4.png"/>
+          <p:cNvPr id="16" name="Picture 15" descr="2b860bf135a1b088.png"/>
           <p:cNvPicPr>
             <a:picLocks noChangeAspect="1"/>
           </p:cNvPicPr>
@@ -7844,8 +7809,8 @@
         </p:blipFill>
         <p:spPr>
           <a:xfrm>
-            <a:off x="7280962" y="3363799"/>
-            <a:ext cx="1557528" cy="673608"/>
+            <a:off x="5534291" y="3026266"/>
+            <a:ext cx="1261872" cy="551688"/>
           </a:xfrm>
           <a:prstGeom prst="rect">
             <a:avLst/>
@@ -7860,8 +7825,8 @@
         </p:nvSpPr>
         <p:spPr>
           <a:xfrm>
-            <a:off x="8838490" y="3472003"/>
-            <a:ext cx="307595" cy="457200"/>
+            <a:off x="6796163" y="3073510"/>
+            <a:ext cx="300128" cy="457200"/>
           </a:xfrm>
           <a:prstGeom prst="rect">
             <a:avLst/>
@@ -7876,7 +7841,7 @@
           <a:p>
             <a:pPr algn="l"/>
             <a:r>
-              <a:rPr sz="2600" b="0" i="0">
+              <a:rPr sz="2400" b="1" i="0">
                 <a:solidFill>
                   <a:srgbClr val="1A1A1A"/>
                 </a:solidFill>
@@ -7895,7 +7860,7 @@
         </p:nvSpPr>
         <p:spPr>
           <a:xfrm>
-            <a:off x="1828800" y="4357447"/>
+            <a:off x="1828800" y="3870562"/>
             <a:ext cx="8503920" cy="548640"/>
           </a:xfrm>
           <a:prstGeom prst="rect">
@@ -7930,7 +7895,7 @@
         </p:nvSpPr>
         <p:spPr>
           <a:xfrm>
-            <a:off x="777240" y="5088967"/>
+            <a:off x="777240" y="4663440"/>
             <a:ext cx="10607040" cy="548640"/>
           </a:xfrm>
           <a:prstGeom prst="rect">
@@ -19833,7 +19798,7 @@
         </p:nvSpPr>
         <p:spPr>
           <a:xfrm>
-            <a:off x="1269706" y="3073908"/>
+            <a:off x="1268839" y="3073908"/>
             <a:ext cx="1674725" cy="457200"/>
           </a:xfrm>
           <a:prstGeom prst="rect">
@@ -19876,7 +19841,7 @@
         </p:blipFill>
         <p:spPr>
           <a:xfrm>
-            <a:off x="2807271" y="3211068"/>
+            <a:off x="2806404" y="3211068"/>
             <a:ext cx="283464" cy="182880"/>
           </a:xfrm>
           <a:prstGeom prst="rect">
@@ -19892,7 +19857,7 @@
         </p:nvSpPr>
         <p:spPr>
           <a:xfrm>
-            <a:off x="3090735" y="3073908"/>
+            <a:off x="3089868" y="3073908"/>
             <a:ext cx="4165510" cy="457200"/>
           </a:xfrm>
           <a:prstGeom prst="rect">
@@ -19935,7 +19900,7 @@
         </p:blipFill>
         <p:spPr>
           <a:xfrm>
-            <a:off x="7119086" y="3208020"/>
+            <a:off x="7118219" y="3208020"/>
             <a:ext cx="167640" cy="188976"/>
           </a:xfrm>
           <a:prstGeom prst="rect">
@@ -19951,8 +19916,8 @@
         </p:nvSpPr>
         <p:spPr>
           <a:xfrm>
-            <a:off x="7286726" y="3073908"/>
-            <a:ext cx="3742246" cy="457200"/>
+            <a:off x="7285859" y="3073908"/>
+            <a:ext cx="3743981" cy="457200"/>
           </a:xfrm>
           <a:prstGeom prst="rect">
             <a:avLst/>
@@ -19973,7 +19938,7 @@
                 </a:solidFill>
                 <a:latin typeface="Century Schoolbook"/>
               </a:rPr>
-              <a:t> in metres per second.</a:t>
+              <a:t> in meters per second.</a:t>
             </a:r>
           </a:p>
         </p:txBody>

--- a/a7/build/out/u4/A7 4.07  Slides.pptx
+++ b/a7/build/out/u4/A7 4.07  Slides.pptx
@@ -6998,8 +6998,78 @@
         </p:nvSpPr>
         <p:spPr>
           <a:xfrm>
-            <a:off x="1234440" y="1851660"/>
-            <a:ext cx="2855752" cy="457200"/>
+            <a:off x="1234440" y="1874519"/>
+            <a:ext cx="10058400" cy="858740"/>
+          </a:xfrm>
+          <a:prstGeom prst="rect">
+            <a:avLst/>
+          </a:prstGeom>
+          <a:noFill/>
+        </p:spPr>
+        <p:txBody>
+          <a:bodyPr wrap="square" lIns="45720" rIns="45720" tIns="18288" bIns="18288" anchor="t">
+            <a:spAutoFit/>
+          </a:bodyPr>
+          <a:lstStyle/>
+          <a:p>
+            <a:pPr algn="l"/>
+            <a:r>
+              <a:rPr sz="2400" b="0" i="0">
+                <a:solidFill>
+                  <a:srgbClr val="1A1A1A"/>
+                </a:solidFill>
+                <a:latin typeface="Century Schoolbook"/>
+              </a:rPr>
+              <a:t>A cyclist has a mass of 70 kilograms and rides at 8 meters per second.</a:t>
+            </a:r>
+          </a:p>
+        </p:txBody>
+      </p:sp>
+      <p:sp>
+        <p:nvSpPr>
+          <p:cNvPr id="10" name="TextBox 9"/>
+          <p:cNvSpPr txBox="1"/>
+          <p:nvPr/>
+        </p:nvSpPr>
+        <p:spPr>
+          <a:xfrm>
+            <a:off x="1234440" y="2842988"/>
+            <a:ext cx="10058400" cy="429370"/>
+          </a:xfrm>
+          <a:prstGeom prst="rect">
+            <a:avLst/>
+          </a:prstGeom>
+          <a:noFill/>
+        </p:spPr>
+        <p:txBody>
+          <a:bodyPr wrap="square" lIns="45720" rIns="45720" tIns="18288" bIns="18288" anchor="t">
+            <a:spAutoFit/>
+          </a:bodyPr>
+          <a:lstStyle/>
+          <a:p>
+            <a:pPr algn="l"/>
+            <a:r>
+              <a:rPr sz="2400" b="0" i="0">
+                <a:solidFill>
+                  <a:srgbClr val="1A1A1A"/>
+                </a:solidFill>
+                <a:latin typeface="Century Schoolbook"/>
+              </a:rPr>
+              <a:t>Her bicycle cost 480 dollars.</a:t>
+            </a:r>
+          </a:p>
+        </p:txBody>
+      </p:sp>
+      <p:sp>
+        <p:nvSpPr>
+          <p:cNvPr id="11" name="TextBox 10"/>
+          <p:cNvSpPr txBox="1"/>
+          <p:nvPr/>
+        </p:nvSpPr>
+        <p:spPr>
+          <a:xfrm>
+            <a:off x="1234440" y="3427807"/>
+            <a:ext cx="2906708" cy="457200"/>
           </a:xfrm>
           <a:prstGeom prst="rect">
             <a:avLst/>
@@ -7020,14 +7090,14 @@
                 </a:solidFill>
                 <a:latin typeface="Century Schoolbook"/>
               </a:rPr>
-              <a:t>A cyclist of mass  </a:t>
+              <a:t>Kinetic energy is  </a:t>
             </a:r>
           </a:p>
         </p:txBody>
       </p:sp>
       <p:pic>
         <p:nvPicPr>
-          <p:cNvPr id="10" name="Picture 9" descr="e1d72257cbc0a034.png"/>
+          <p:cNvPr id="12" name="Picture 11" descr="8419d3078da3665a.png"/>
           <p:cNvPicPr>
             <a:picLocks noChangeAspect="1"/>
           </p:cNvPicPr>
@@ -7041,8 +7111,8 @@
         </p:blipFill>
         <p:spPr>
           <a:xfrm>
-            <a:off x="3953032" y="1964435"/>
-            <a:ext cx="877824" cy="231648"/>
+            <a:off x="4003988" y="3382087"/>
+            <a:ext cx="1261872" cy="548640"/>
           </a:xfrm>
           <a:prstGeom prst="rect">
             <a:avLst/>
@@ -7051,14 +7121,14 @@
       </p:pic>
       <p:sp>
         <p:nvSpPr>
-          <p:cNvPr id="11" name="TextBox 10"/>
-          <p:cNvSpPr txBox="1"/>
-          <p:nvPr/>
-        </p:nvSpPr>
-        <p:spPr>
-          <a:xfrm>
-            <a:off x="4830856" y="1851660"/>
-            <a:ext cx="2163038" cy="457200"/>
+          <p:cNvPr id="13" name="TextBox 12"/>
+          <p:cNvSpPr txBox="1"/>
+          <p:nvPr/>
+        </p:nvSpPr>
+        <p:spPr>
+          <a:xfrm>
+            <a:off x="5265860" y="3427807"/>
+            <a:ext cx="2190856" cy="457200"/>
           </a:xfrm>
           <a:prstGeom prst="rect">
             <a:avLst/>
@@ -7079,14 +7149,14 @@
                 </a:solidFill>
                 <a:latin typeface="Century Schoolbook"/>
               </a:rPr>
-              <a:t>  kg rides at  </a:t>
+              <a:t>,  for a mass  </a:t>
             </a:r>
           </a:p>
         </p:txBody>
       </p:sp>
       <p:pic>
         <p:nvPicPr>
-          <p:cNvPr id="12" name="Picture 11" descr="aa5cd635672dcdba.png"/>
+          <p:cNvPr id="14" name="Picture 13" descr="38ea68753f073419.png"/>
           <p:cNvPicPr>
             <a:picLocks noChangeAspect="1"/>
           </p:cNvPicPr>
@@ -7100,8 +7170,8 @@
         </p:blipFill>
         <p:spPr>
           <a:xfrm>
-            <a:off x="6856734" y="1965960"/>
-            <a:ext cx="609600" cy="228600"/>
+            <a:off x="7319556" y="3581731"/>
+            <a:ext cx="231648" cy="149352"/>
           </a:xfrm>
           <a:prstGeom prst="rect">
             <a:avLst/>
@@ -7110,14 +7180,14 @@
       </p:pic>
       <p:sp>
         <p:nvSpPr>
-          <p:cNvPr id="13" name="TextBox 12"/>
-          <p:cNvSpPr txBox="1"/>
-          <p:nvPr/>
-        </p:nvSpPr>
-        <p:spPr>
-          <a:xfrm>
-            <a:off x="7466334" y="1851660"/>
-            <a:ext cx="1006410" cy="457200"/>
+          <p:cNvPr id="15" name="TextBox 14"/>
+          <p:cNvSpPr txBox="1"/>
+          <p:nvPr/>
+        </p:nvSpPr>
+        <p:spPr>
+          <a:xfrm>
+            <a:off x="7551204" y="3427807"/>
+            <a:ext cx="2334994" cy="457200"/>
           </a:xfrm>
           <a:prstGeom prst="rect">
             <a:avLst/>
@@ -7138,84 +7208,14 @@
                 </a:solidFill>
                 <a:latin typeface="Century Schoolbook"/>
               </a:rPr>
-              <a:t>  m/s.</a:t>
-            </a:r>
-          </a:p>
-        </p:txBody>
-      </p:sp>
-      <p:sp>
-        <p:nvSpPr>
-          <p:cNvPr id="14" name="TextBox 13"/>
-          <p:cNvSpPr txBox="1"/>
-          <p:nvPr/>
-        </p:nvSpPr>
-        <p:spPr>
-          <a:xfrm>
-            <a:off x="1234440" y="2487168"/>
-            <a:ext cx="10058400" cy="429370"/>
-          </a:xfrm>
-          <a:prstGeom prst="rect">
-            <a:avLst/>
-          </a:prstGeom>
-          <a:noFill/>
-        </p:spPr>
-        <p:txBody>
-          <a:bodyPr wrap="square" lIns="45720" rIns="45720" tIns="18288" bIns="18288" anchor="t">
-            <a:spAutoFit/>
-          </a:bodyPr>
-          <a:lstStyle/>
-          <a:p>
-            <a:pPr algn="l"/>
-            <a:r>
-              <a:rPr sz="2400" b="0" i="0">
-                <a:solidFill>
-                  <a:srgbClr val="1A1A1A"/>
-                </a:solidFill>
-                <a:latin typeface="Century Schoolbook"/>
-              </a:rPr>
-              <a:t>Her bicycle cost 480 dollars.</a:t>
-            </a:r>
-          </a:p>
-        </p:txBody>
-      </p:sp>
-      <p:sp>
-        <p:nvSpPr>
-          <p:cNvPr id="15" name="TextBox 14"/>
-          <p:cNvSpPr txBox="1"/>
-          <p:nvPr/>
-        </p:nvSpPr>
-        <p:spPr>
-          <a:xfrm>
-            <a:off x="1234440" y="3071986"/>
-            <a:ext cx="4437011" cy="457200"/>
-          </a:xfrm>
-          <a:prstGeom prst="rect">
-            <a:avLst/>
-          </a:prstGeom>
-          <a:noFill/>
-        </p:spPr>
-        <p:txBody>
-          <a:bodyPr wrap="none" lIns="45720" rIns="45720" tIns="18288" bIns="18288" anchor="ctr">
-            <a:noAutofit/>
-          </a:bodyPr>
-          <a:lstStyle/>
-          <a:p>
-            <a:pPr algn="l"/>
-            <a:r>
-              <a:rPr sz="2400" b="1" i="0">
-                <a:solidFill>
-                  <a:srgbClr val="1A1A1A"/>
-                </a:solidFill>
-                <a:latin typeface="Century Schoolbook"/>
-              </a:rPr>
-              <a:t>Find her kinetic energy,  </a:t>
+              <a:t>  and a speed  </a:t>
             </a:r>
           </a:p>
         </p:txBody>
       </p:sp>
       <p:pic>
         <p:nvPicPr>
-          <p:cNvPr id="16" name="Picture 15" descr="8419d3078da3665a.png"/>
+          <p:cNvPr id="16" name="Picture 15" descr="17f1143b444dcfe3.png"/>
           <p:cNvPicPr>
             <a:picLocks noChangeAspect="1"/>
           </p:cNvPicPr>
@@ -7229,8 +7229,8 @@
         </p:blipFill>
         <p:spPr>
           <a:xfrm>
-            <a:off x="5534291" y="3026266"/>
-            <a:ext cx="1261872" cy="548640"/>
+            <a:off x="9749038" y="3580207"/>
+            <a:ext cx="137160" cy="152400"/>
           </a:xfrm>
           <a:prstGeom prst="rect">
             <a:avLst/>
@@ -7245,7 +7245,7 @@
         </p:nvSpPr>
         <p:spPr>
           <a:xfrm>
-            <a:off x="6796163" y="3071986"/>
+            <a:off x="9886198" y="3427807"/>
             <a:ext cx="300128" cy="457200"/>
           </a:xfrm>
           <a:prstGeom prst="rect">
@@ -7261,26 +7261,61 @@
           <a:p>
             <a:pPr algn="l"/>
             <a:r>
+              <a:rPr sz="2400" b="0" i="0">
+                <a:solidFill>
+                  <a:srgbClr val="1A1A1A"/>
+                </a:solidFill>
+                <a:latin typeface="Century Schoolbook"/>
+              </a:rPr>
+              <a:t>.</a:t>
+            </a:r>
+          </a:p>
+        </p:txBody>
+      </p:sp>
+      <p:sp>
+        <p:nvSpPr>
+          <p:cNvPr id="18" name="TextBox 17"/>
+          <p:cNvSpPr txBox="1"/>
+          <p:nvPr/>
+        </p:nvSpPr>
+        <p:spPr>
+          <a:xfrm>
+            <a:off x="1234440" y="4131895"/>
+            <a:ext cx="10058400" cy="429370"/>
+          </a:xfrm>
+          <a:prstGeom prst="rect">
+            <a:avLst/>
+          </a:prstGeom>
+          <a:noFill/>
+        </p:spPr>
+        <p:txBody>
+          <a:bodyPr wrap="square" lIns="45720" rIns="45720" tIns="18288" bIns="18288" anchor="t">
+            <a:spAutoFit/>
+          </a:bodyPr>
+          <a:lstStyle/>
+          <a:p>
+            <a:pPr algn="l"/>
+            <a:r>
               <a:rPr sz="2400" b="1" i="0">
                 <a:solidFill>
                   <a:srgbClr val="1A1A1A"/>
                 </a:solidFill>
                 <a:latin typeface="Century Schoolbook"/>
               </a:rPr>
-              <a:t>.</a:t>
-            </a:r>
-          </a:p>
-        </p:txBody>
-      </p:sp>
-      <p:sp>
-        <p:nvSpPr>
-          <p:cNvPr id="18" name="TextBox 17"/>
-          <p:cNvSpPr txBox="1"/>
-          <p:nvPr/>
-        </p:nvSpPr>
-        <p:spPr>
-          <a:xfrm>
-            <a:off x="777240" y="4343400"/>
+              <a:t>Find her kinetic energy.</a:t>
+            </a:r>
+          </a:p>
+        </p:txBody>
+      </p:sp>
+      <p:sp>
+        <p:nvSpPr>
+          <p:cNvPr id="19" name="TextBox 18"/>
+          <p:cNvSpPr txBox="1"/>
+          <p:nvPr/>
+        </p:nvSpPr>
+        <p:spPr>
+          <a:xfrm>
+            <a:off x="777240" y="4853873"/>
             <a:ext cx="10607040" cy="457200"/>
           </a:xfrm>
           <a:prstGeom prst="rect">
@@ -7578,8 +7613,78 @@
         </p:nvSpPr>
         <p:spPr>
           <a:xfrm>
-            <a:off x="1234440" y="1851660"/>
-            <a:ext cx="2855752" cy="457200"/>
+            <a:off x="1234440" y="1874519"/>
+            <a:ext cx="10058400" cy="858740"/>
+          </a:xfrm>
+          <a:prstGeom prst="rect">
+            <a:avLst/>
+          </a:prstGeom>
+          <a:noFill/>
+        </p:spPr>
+        <p:txBody>
+          <a:bodyPr wrap="square" lIns="45720" rIns="45720" tIns="18288" bIns="18288" anchor="t">
+            <a:spAutoFit/>
+          </a:bodyPr>
+          <a:lstStyle/>
+          <a:p>
+            <a:pPr algn="l"/>
+            <a:r>
+              <a:rPr sz="2400" b="0" i="0">
+                <a:solidFill>
+                  <a:srgbClr val="1A1A1A"/>
+                </a:solidFill>
+                <a:latin typeface="Century Schoolbook"/>
+              </a:rPr>
+              <a:t>A cyclist has a mass of 70 kilograms and rides at 8 meters per second.</a:t>
+            </a:r>
+          </a:p>
+        </p:txBody>
+      </p:sp>
+      <p:sp>
+        <p:nvSpPr>
+          <p:cNvPr id="10" name="TextBox 9"/>
+          <p:cNvSpPr txBox="1"/>
+          <p:nvPr/>
+        </p:nvSpPr>
+        <p:spPr>
+          <a:xfrm>
+            <a:off x="1234440" y="2842988"/>
+            <a:ext cx="10058400" cy="429370"/>
+          </a:xfrm>
+          <a:prstGeom prst="rect">
+            <a:avLst/>
+          </a:prstGeom>
+          <a:noFill/>
+        </p:spPr>
+        <p:txBody>
+          <a:bodyPr wrap="square" lIns="45720" rIns="45720" tIns="18288" bIns="18288" anchor="t">
+            <a:spAutoFit/>
+          </a:bodyPr>
+          <a:lstStyle/>
+          <a:p>
+            <a:pPr algn="l"/>
+            <a:r>
+              <a:rPr sz="2400" b="0" i="0">
+                <a:solidFill>
+                  <a:srgbClr val="1A1A1A"/>
+                </a:solidFill>
+                <a:latin typeface="Century Schoolbook"/>
+              </a:rPr>
+              <a:t>Her bicycle cost 480 dollars.</a:t>
+            </a:r>
+          </a:p>
+        </p:txBody>
+      </p:sp>
+      <p:sp>
+        <p:nvSpPr>
+          <p:cNvPr id="11" name="TextBox 10"/>
+          <p:cNvSpPr txBox="1"/>
+          <p:nvPr/>
+        </p:nvSpPr>
+        <p:spPr>
+          <a:xfrm>
+            <a:off x="1234440" y="3429331"/>
+            <a:ext cx="2906708" cy="457200"/>
           </a:xfrm>
           <a:prstGeom prst="rect">
             <a:avLst/>
@@ -7600,14 +7705,14 @@
                 </a:solidFill>
                 <a:latin typeface="Century Schoolbook"/>
               </a:rPr>
-              <a:t>A cyclist of mass  </a:t>
+              <a:t>Kinetic energy is  </a:t>
             </a:r>
           </a:p>
         </p:txBody>
       </p:sp>
       <p:pic>
         <p:nvPicPr>
-          <p:cNvPr id="10" name="Picture 9" descr="996cd0b9dd16e722.png"/>
+          <p:cNvPr id="12" name="Picture 11" descr="2b860bf135a1b088.png"/>
           <p:cNvPicPr>
             <a:picLocks noChangeAspect="1"/>
           </p:cNvPicPr>
@@ -7621,8 +7726,8 @@
         </p:blipFill>
         <p:spPr>
           <a:xfrm>
-            <a:off x="3953032" y="1964435"/>
-            <a:ext cx="883920" cy="231648"/>
+            <a:off x="4003988" y="3382087"/>
+            <a:ext cx="1261872" cy="551688"/>
           </a:xfrm>
           <a:prstGeom prst="rect">
             <a:avLst/>
@@ -7631,14 +7736,14 @@
       </p:pic>
       <p:sp>
         <p:nvSpPr>
-          <p:cNvPr id="11" name="TextBox 10"/>
-          <p:cNvSpPr txBox="1"/>
-          <p:nvPr/>
-        </p:nvSpPr>
-        <p:spPr>
-          <a:xfrm>
-            <a:off x="4836952" y="1851660"/>
-            <a:ext cx="2163038" cy="457200"/>
+          <p:cNvPr id="13" name="TextBox 12"/>
+          <p:cNvSpPr txBox="1"/>
+          <p:nvPr/>
+        </p:nvSpPr>
+        <p:spPr>
+          <a:xfrm>
+            <a:off x="5265860" y="3429331"/>
+            <a:ext cx="2190856" cy="457200"/>
           </a:xfrm>
           <a:prstGeom prst="rect">
             <a:avLst/>
@@ -7659,14 +7764,14 @@
                 </a:solidFill>
                 <a:latin typeface="Century Schoolbook"/>
               </a:rPr>
-              <a:t>  kg rides at  </a:t>
+              <a:t>,  for a mass  </a:t>
             </a:r>
           </a:p>
         </p:txBody>
       </p:sp>
       <p:pic>
         <p:nvPicPr>
-          <p:cNvPr id="12" name="Picture 11" descr="f7f7478f3b1d3c67.png"/>
+          <p:cNvPr id="14" name="Picture 13" descr="38ea68753f073419.png"/>
           <p:cNvPicPr>
             <a:picLocks noChangeAspect="1"/>
           </p:cNvPicPr>
@@ -7680,8 +7785,8 @@
         </p:blipFill>
         <p:spPr>
           <a:xfrm>
-            <a:off x="6862830" y="1965960"/>
-            <a:ext cx="612648" cy="228600"/>
+            <a:off x="7319556" y="3583255"/>
+            <a:ext cx="231648" cy="149352"/>
           </a:xfrm>
           <a:prstGeom prst="rect">
             <a:avLst/>
@@ -7690,14 +7795,14 @@
       </p:pic>
       <p:sp>
         <p:nvSpPr>
-          <p:cNvPr id="13" name="TextBox 12"/>
-          <p:cNvSpPr txBox="1"/>
-          <p:nvPr/>
-        </p:nvSpPr>
-        <p:spPr>
-          <a:xfrm>
-            <a:off x="7475478" y="1851660"/>
-            <a:ext cx="1006410" cy="457200"/>
+          <p:cNvPr id="15" name="TextBox 14"/>
+          <p:cNvSpPr txBox="1"/>
+          <p:nvPr/>
+        </p:nvSpPr>
+        <p:spPr>
+          <a:xfrm>
+            <a:off x="7551204" y="3429331"/>
+            <a:ext cx="2334994" cy="457200"/>
           </a:xfrm>
           <a:prstGeom prst="rect">
             <a:avLst/>
@@ -7718,84 +7823,14 @@
                 </a:solidFill>
                 <a:latin typeface="Century Schoolbook"/>
               </a:rPr>
-              <a:t>  m/s.</a:t>
-            </a:r>
-          </a:p>
-        </p:txBody>
-      </p:sp>
-      <p:sp>
-        <p:nvSpPr>
-          <p:cNvPr id="14" name="TextBox 13"/>
-          <p:cNvSpPr txBox="1"/>
-          <p:nvPr/>
-        </p:nvSpPr>
-        <p:spPr>
-          <a:xfrm>
-            <a:off x="1234440" y="2487168"/>
-            <a:ext cx="10058400" cy="429370"/>
-          </a:xfrm>
-          <a:prstGeom prst="rect">
-            <a:avLst/>
-          </a:prstGeom>
-          <a:noFill/>
-        </p:spPr>
-        <p:txBody>
-          <a:bodyPr wrap="square" lIns="45720" rIns="45720" tIns="18288" bIns="18288" anchor="t">
-            <a:spAutoFit/>
-          </a:bodyPr>
-          <a:lstStyle/>
-          <a:p>
-            <a:pPr algn="l"/>
-            <a:r>
-              <a:rPr sz="2400" b="0" i="0">
-                <a:solidFill>
-                  <a:srgbClr val="1A1A1A"/>
-                </a:solidFill>
-                <a:latin typeface="Century Schoolbook"/>
-              </a:rPr>
-              <a:t>Her bicycle cost 480 dollars.</a:t>
-            </a:r>
-          </a:p>
-        </p:txBody>
-      </p:sp>
-      <p:sp>
-        <p:nvSpPr>
-          <p:cNvPr id="15" name="TextBox 14"/>
-          <p:cNvSpPr txBox="1"/>
-          <p:nvPr/>
-        </p:nvSpPr>
-        <p:spPr>
-          <a:xfrm>
-            <a:off x="1234440" y="3073510"/>
-            <a:ext cx="4437011" cy="457200"/>
-          </a:xfrm>
-          <a:prstGeom prst="rect">
-            <a:avLst/>
-          </a:prstGeom>
-          <a:noFill/>
-        </p:spPr>
-        <p:txBody>
-          <a:bodyPr wrap="none" lIns="45720" rIns="45720" tIns="18288" bIns="18288" anchor="ctr">
-            <a:noAutofit/>
-          </a:bodyPr>
-          <a:lstStyle/>
-          <a:p>
-            <a:pPr algn="l"/>
-            <a:r>
-              <a:rPr sz="2400" b="1" i="0">
-                <a:solidFill>
-                  <a:srgbClr val="1A1A1A"/>
-                </a:solidFill>
-                <a:latin typeface="Century Schoolbook"/>
-              </a:rPr>
-              <a:t>Find her kinetic energy,  </a:t>
+              <a:t>  and a speed  </a:t>
             </a:r>
           </a:p>
         </p:txBody>
       </p:sp>
       <p:pic>
         <p:nvPicPr>
-          <p:cNvPr id="16" name="Picture 15" descr="2b860bf135a1b088.png"/>
+          <p:cNvPr id="16" name="Picture 15" descr="17f1143b444dcfe3.png"/>
           <p:cNvPicPr>
             <a:picLocks noChangeAspect="1"/>
           </p:cNvPicPr>
@@ -7809,8 +7844,8 @@
         </p:blipFill>
         <p:spPr>
           <a:xfrm>
-            <a:off x="5534291" y="3026266"/>
-            <a:ext cx="1261872" cy="551688"/>
+            <a:off x="9749038" y="3581731"/>
+            <a:ext cx="137160" cy="152400"/>
           </a:xfrm>
           <a:prstGeom prst="rect">
             <a:avLst/>
@@ -7825,7 +7860,7 @@
         </p:nvSpPr>
         <p:spPr>
           <a:xfrm>
-            <a:off x="6796163" y="3073510"/>
+            <a:off x="9886198" y="3429331"/>
             <a:ext cx="300128" cy="457200"/>
           </a:xfrm>
           <a:prstGeom prst="rect">
@@ -7841,26 +7876,61 @@
           <a:p>
             <a:pPr algn="l"/>
             <a:r>
+              <a:rPr sz="2400" b="0" i="0">
+                <a:solidFill>
+                  <a:srgbClr val="1A1A1A"/>
+                </a:solidFill>
+                <a:latin typeface="Century Schoolbook"/>
+              </a:rPr>
+              <a:t>.</a:t>
+            </a:r>
+          </a:p>
+        </p:txBody>
+      </p:sp>
+      <p:sp>
+        <p:nvSpPr>
+          <p:cNvPr id="18" name="TextBox 17"/>
+          <p:cNvSpPr txBox="1"/>
+          <p:nvPr/>
+        </p:nvSpPr>
+        <p:spPr>
+          <a:xfrm>
+            <a:off x="1234440" y="4134943"/>
+            <a:ext cx="10058400" cy="429370"/>
+          </a:xfrm>
+          <a:prstGeom prst="rect">
+            <a:avLst/>
+          </a:prstGeom>
+          <a:noFill/>
+        </p:spPr>
+        <p:txBody>
+          <a:bodyPr wrap="square" lIns="45720" rIns="45720" tIns="18288" bIns="18288" anchor="t">
+            <a:spAutoFit/>
+          </a:bodyPr>
+          <a:lstStyle/>
+          <a:p>
+            <a:pPr algn="l"/>
+            <a:r>
               <a:rPr sz="2400" b="1" i="0">
                 <a:solidFill>
                   <a:srgbClr val="1A1A1A"/>
                 </a:solidFill>
                 <a:latin typeface="Century Schoolbook"/>
               </a:rPr>
-              <a:t>.</a:t>
-            </a:r>
-          </a:p>
-        </p:txBody>
-      </p:sp>
-      <p:sp>
-        <p:nvSpPr>
-          <p:cNvPr id="18" name="TextBox 17"/>
-          <p:cNvSpPr txBox="1"/>
-          <p:nvPr/>
-        </p:nvSpPr>
-        <p:spPr>
-          <a:xfrm>
-            <a:off x="1828800" y="3870562"/>
+              <a:t>Find her kinetic energy.</a:t>
+            </a:r>
+          </a:p>
+        </p:txBody>
+      </p:sp>
+      <p:sp>
+        <p:nvSpPr>
+          <p:cNvPr id="19" name="TextBox 18"/>
+          <p:cNvSpPr txBox="1"/>
+          <p:nvPr/>
+        </p:nvSpPr>
+        <p:spPr>
+          <a:xfrm>
+            <a:off x="1828800" y="4765481"/>
             <a:ext cx="8503920" cy="548640"/>
           </a:xfrm>
           <a:prstGeom prst="rect">
@@ -7889,13 +7959,13 @@
       </p:sp>
       <p:sp>
         <p:nvSpPr>
-          <p:cNvPr id="19" name="TextBox 18"/>
-          <p:cNvSpPr txBox="1"/>
-          <p:nvPr/>
-        </p:nvSpPr>
-        <p:spPr>
-          <a:xfrm>
-            <a:off x="777240" y="4663440"/>
+          <p:cNvPr id="20" name="TextBox 19"/>
+          <p:cNvSpPr txBox="1"/>
+          <p:nvPr/>
+        </p:nvSpPr>
+        <p:spPr>
+          <a:xfrm>
+            <a:off x="777240" y="5497001"/>
             <a:ext cx="10607040" cy="548640"/>
           </a:xfrm>
           <a:prstGeom prst="rect">

--- a/a7/build/out/u4/A7 4.07  Slides.pptx
+++ b/a7/build/out/u4/A7 4.07  Slides.pptx
@@ -3442,7 +3442,7 @@
                 </a:solidFill>
                 <a:latin typeface="Century Schoolbook"/>
               </a:rPr>
-              <a:t>Today the expression arrives wrapped in a sentence — and the sentence is not a list of key words.</a:t>
+              <a:t>Today the expression is in a sentence — not in key words.</a:t>
             </a:r>
           </a:p>
         </p:txBody>
